--- a/slides/mapreduce/mapreduce_by_Mahmoud_Parsian/04_Introduction_to_MapReduce_highlevel.pptx
+++ b/slides/mapreduce/mapreduce_by_Mahmoud_Parsian/04_Introduction_to_MapReduce_highlevel.pptx
@@ -5,10 +5,10 @@
     <p:sldMasterId id="2147483648" r:id="rId1"/>
   </p:sldMasterIdLst>
   <p:notesMasterIdLst>
-    <p:notesMasterId r:id="rId34"/>
+    <p:notesMasterId r:id="rId33"/>
   </p:notesMasterIdLst>
   <p:handoutMasterIdLst>
-    <p:handoutMasterId r:id="rId35"/>
+    <p:handoutMasterId r:id="rId34"/>
   </p:handoutMasterIdLst>
   <p:sldIdLst>
     <p:sldId id="256" r:id="rId2"/>
@@ -40,9 +40,8 @@
     <p:sldId id="287" r:id="rId28"/>
     <p:sldId id="289" r:id="rId29"/>
     <p:sldId id="290" r:id="rId30"/>
-    <p:sldId id="291" r:id="rId31"/>
-    <p:sldId id="292" r:id="rId32"/>
-    <p:sldId id="293" r:id="rId33"/>
+    <p:sldId id="292" r:id="rId31"/>
+    <p:sldId id="293" r:id="rId32"/>
   </p:sldIdLst>
   <p:sldSz cx="9144000" cy="6858000" type="screen4x3"/>
   <p:notesSz cx="6858000" cy="9144000"/>
@@ -141,6 +140,22 @@
       </a:defRPr>
     </a:lvl9pPr>
   </p:defaultTextStyle>
+  <p:extLst>
+    <p:ext uri="{EFAFB233-063F-42B5-8137-9DF3F51BA10A}">
+      <p15:sldGuideLst xmlns:p15="http://schemas.microsoft.com/office/powerpoint/2012/main">
+        <p15:guide id="1" orient="horz" pos="2160">
+          <p15:clr>
+            <a:srgbClr val="A4A3A4"/>
+          </p15:clr>
+        </p15:guide>
+        <p15:guide id="2" pos="2880">
+          <p15:clr>
+            <a:srgbClr val="A4A3A4"/>
+          </p15:clr>
+        </p15:guide>
+      </p15:sldGuideLst>
+    </p:ext>
+  </p:extLst>
 </p:presentation>
 </file>
 
@@ -226,7 +241,7 @@
           <a:p>
             <a:fld id="{5898A75C-3171-6A47-AE9C-AC5814822D24}" type="datetimeFigureOut">
               <a:rPr lang="en-US" smtClean="0"/>
-              <a:t>4/10/14</a:t>
+              <a:t>8/30/26</a:t>
             </a:fld>
             <a:endParaRPr lang="en-US"/>
           </a:p>
@@ -392,7 +407,7 @@
           <a:p>
             <a:fld id="{E0B6811D-78D9-A044-82B7-47C3E7EC69EF}" type="datetimeFigureOut">
               <a:rPr lang="en-US" smtClean="0"/>
-              <a:t>4/10/14</a:t>
+              <a:t>8/30/26</a:t>
             </a:fld>
             <a:endParaRPr lang="en-US"/>
           </a:p>
@@ -456,38 +471,37 @@
           <a:p>
             <a:pPr lvl="0"/>
             <a:r>
-              <a:rPr lang="en-US" smtClean="0"/>
+              <a:rPr lang="en-US"/>
               <a:t>Click to edit Master text styles</a:t>
             </a:r>
           </a:p>
           <a:p>
             <a:pPr lvl="1"/>
             <a:r>
-              <a:rPr lang="en-US" smtClean="0"/>
+              <a:rPr lang="en-US"/>
               <a:t>Second level</a:t>
             </a:r>
           </a:p>
           <a:p>
             <a:pPr lvl="2"/>
             <a:r>
-              <a:rPr lang="en-US" smtClean="0"/>
+              <a:rPr lang="en-US"/>
               <a:t>Third level</a:t>
             </a:r>
           </a:p>
           <a:p>
             <a:pPr lvl="3"/>
             <a:r>
-              <a:rPr lang="en-US" smtClean="0"/>
+              <a:rPr lang="en-US"/>
               <a:t>Fourth level</a:t>
             </a:r>
           </a:p>
           <a:p>
             <a:pPr lvl="4"/>
             <a:r>
-              <a:rPr lang="en-US" smtClean="0"/>
+              <a:rPr lang="en-US"/>
               <a:t>Fifth level</a:t>
             </a:r>
-            <a:endParaRPr lang="en-US"/>
           </a:p>
         </p:txBody>
       </p:sp>
@@ -706,19 +720,19 @@
           <a:lstStyle/>
           <a:p>
             <a:r>
-              <a:rPr lang="en-US" dirty="0" smtClean="0"/>
+              <a:rPr lang="en-US" dirty="0"/>
               <a:t>SICP - the famous introductory</a:t>
             </a:r>
             <a:r>
-              <a:rPr lang="en-US" baseline="0" dirty="0" smtClean="0"/>
+              <a:rPr lang="en-US" baseline="0" dirty="0"/>
               <a:t> computer science course at MIT, taught by Hal Abelson and Gerald </a:t>
             </a:r>
             <a:r>
-              <a:rPr lang="en-US" baseline="0" dirty="0" err="1" smtClean="0"/>
+              <a:rPr lang="en-US" baseline="0" dirty="0" err="1"/>
               <a:t>Sussman</a:t>
             </a:r>
             <a:r>
-              <a:rPr lang="en-US" baseline="0" dirty="0" smtClean="0"/>
+              <a:rPr lang="en-US" baseline="0" dirty="0"/>
               <a:t>, uses ‘Scheme’, which is a dialect of LISP.</a:t>
             </a:r>
             <a:endParaRPr lang="en-US" dirty="0"/>
@@ -806,19 +820,19 @@
           <a:lstStyle/>
           <a:p>
             <a:r>
-              <a:rPr lang="en-US" dirty="0" smtClean="0"/>
+              <a:rPr lang="en-US" dirty="0"/>
               <a:t>SICP - the famous introductory</a:t>
             </a:r>
             <a:r>
-              <a:rPr lang="en-US" baseline="0" dirty="0" smtClean="0"/>
+              <a:rPr lang="en-US" baseline="0" dirty="0"/>
               <a:t> computer science course at MIT, taught by Hal Abelson and Gerald </a:t>
             </a:r>
             <a:r>
-              <a:rPr lang="en-US" baseline="0" dirty="0" err="1" smtClean="0"/>
+              <a:rPr lang="en-US" baseline="0" dirty="0" err="1"/>
               <a:t>Sussman</a:t>
             </a:r>
             <a:r>
-              <a:rPr lang="en-US" baseline="0" dirty="0" smtClean="0"/>
+              <a:rPr lang="en-US" baseline="0" dirty="0"/>
               <a:t>, uses ‘Scheme’, which is a dialect of LISP.</a:t>
             </a:r>
             <a:endParaRPr lang="en-US" dirty="0"/>
@@ -906,11 +920,11 @@
           <a:lstStyle/>
           <a:p>
             <a:r>
-              <a:rPr lang="en-US" dirty="0" smtClean="0"/>
+              <a:rPr lang="en-US" dirty="0"/>
               <a:t>Code written by the user is in blue</a:t>
             </a:r>
             <a:r>
-              <a:rPr lang="en-US" baseline="0" dirty="0" smtClean="0"/>
+              <a:rPr lang="en-US" baseline="0" dirty="0"/>
               <a:t> (with comments in green).</a:t>
             </a:r>
             <a:endParaRPr lang="en-US" dirty="0"/>
@@ -934,7 +948,7 @@
           <a:p>
             <a:fld id="{1E2BD875-A6DF-B94C-8D9A-C5F7B0D1F2C7}" type="slidenum">
               <a:rPr lang="en-US" smtClean="0"/>
-              <a:t>31</a:t>
+              <a:t>30</a:t>
             </a:fld>
             <a:endParaRPr lang="en-US"/>
           </a:p>
@@ -998,11 +1012,11 @@
           <a:lstStyle/>
           <a:p>
             <a:r>
-              <a:rPr lang="en-US" dirty="0" smtClean="0"/>
+              <a:rPr lang="en-US" dirty="0"/>
               <a:t>Code written by the user is in blue</a:t>
             </a:r>
             <a:r>
-              <a:rPr lang="en-US" baseline="0" dirty="0" smtClean="0"/>
+              <a:rPr lang="en-US" baseline="0" dirty="0"/>
               <a:t> (with comments in green).</a:t>
             </a:r>
             <a:endParaRPr lang="en-US" dirty="0"/>
@@ -1026,7 +1040,7 @@
           <a:p>
             <a:fld id="{1E2BD875-A6DF-B94C-8D9A-C5F7B0D1F2C7}" type="slidenum">
               <a:rPr lang="en-US" smtClean="0"/>
-              <a:t>32</a:t>
+              <a:t>31</a:t>
             </a:fld>
             <a:endParaRPr lang="en-US"/>
           </a:p>
@@ -1087,10 +1101,9 @@
           </a:lstStyle>
           <a:p>
             <a:r>
-              <a:rPr lang="en-US" smtClean="0"/>
+              <a:rPr lang="en-US"/>
               <a:t>Click to edit Master title style</a:t>
             </a:r>
-            <a:endParaRPr lang="en-US"/>
           </a:p>
         </p:txBody>
       </p:sp>
@@ -1206,10 +1219,9 @@
           </a:lstStyle>
           <a:p>
             <a:r>
-              <a:rPr lang="en-US" dirty="0" smtClean="0"/>
+              <a:rPr lang="en-US" dirty="0"/>
               <a:t>Click to edit Master subtitle style</a:t>
             </a:r>
-            <a:endParaRPr lang="en-US" dirty="0"/>
           </a:p>
         </p:txBody>
       </p:sp>
@@ -1229,10 +1241,9 @@
           <a:lstStyle/>
           <a:p>
             <a:r>
-              <a:rPr lang="en-US" smtClean="0"/>
+              <a:rPr lang="en-US"/>
               <a:t>Feb 21, 2014</a:t>
             </a:r>
-            <a:endParaRPr lang="en-US"/>
           </a:p>
         </p:txBody>
       </p:sp>
@@ -1252,7 +1263,7 @@
           <a:lstStyle/>
           <a:p>
             <a:r>
-              <a:rPr lang="de-DE" smtClean="0"/>
+              <a:rPr lang="de-DE"/>
               <a:t>CS512 | Spring 2014</a:t>
             </a:r>
             <a:endParaRPr lang="en-US" dirty="0"/>
@@ -1337,10 +1348,9 @@
           </a:lstStyle>
           <a:p>
             <a:r>
-              <a:rPr lang="en-US" smtClean="0"/>
+              <a:rPr lang="en-US"/>
               <a:t>Click to edit Master title style</a:t>
             </a:r>
-            <a:endParaRPr lang="en-US"/>
           </a:p>
         </p:txBody>
       </p:sp>
@@ -1464,7 +1474,7 @@
           <a:p>
             <a:pPr lvl="0"/>
             <a:r>
-              <a:rPr lang="en-US" smtClean="0"/>
+              <a:rPr lang="en-US"/>
               <a:t>Click to edit Master text styles</a:t>
             </a:r>
           </a:p>
@@ -1486,10 +1496,9 @@
           <a:lstStyle/>
           <a:p>
             <a:r>
-              <a:rPr lang="en-US" smtClean="0"/>
+              <a:rPr lang="en-US"/>
               <a:t>Feb 21, 2014</a:t>
             </a:r>
-            <a:endParaRPr lang="en-US"/>
           </a:p>
         </p:txBody>
       </p:sp>
@@ -1509,7 +1518,7 @@
           <a:lstStyle/>
           <a:p>
             <a:r>
-              <a:rPr lang="de-DE" smtClean="0"/>
+              <a:rPr lang="de-DE"/>
               <a:t>CS512 | Spring 2014</a:t>
             </a:r>
             <a:endParaRPr lang="en-US"/>
@@ -1585,10 +1594,9 @@
           <a:lstStyle/>
           <a:p>
             <a:r>
-              <a:rPr lang="en-US" smtClean="0"/>
+              <a:rPr lang="en-US"/>
               <a:t>Click to edit Master title style</a:t>
             </a:r>
-            <a:endParaRPr lang="en-US"/>
           </a:p>
         </p:txBody>
       </p:sp>
@@ -1609,38 +1617,37 @@
           <a:p>
             <a:pPr lvl="0"/>
             <a:r>
-              <a:rPr lang="en-US" smtClean="0"/>
+              <a:rPr lang="en-US"/>
               <a:t>Click to edit Master text styles</a:t>
             </a:r>
           </a:p>
           <a:p>
             <a:pPr lvl="1"/>
             <a:r>
-              <a:rPr lang="en-US" smtClean="0"/>
+              <a:rPr lang="en-US"/>
               <a:t>Second level</a:t>
             </a:r>
           </a:p>
           <a:p>
             <a:pPr lvl="2"/>
             <a:r>
-              <a:rPr lang="en-US" smtClean="0"/>
+              <a:rPr lang="en-US"/>
               <a:t>Third level</a:t>
             </a:r>
           </a:p>
           <a:p>
             <a:pPr lvl="3"/>
             <a:r>
-              <a:rPr lang="en-US" smtClean="0"/>
+              <a:rPr lang="en-US"/>
               <a:t>Fourth level</a:t>
             </a:r>
           </a:p>
           <a:p>
             <a:pPr lvl="4"/>
             <a:r>
-              <a:rPr lang="en-US" smtClean="0"/>
+              <a:rPr lang="en-US"/>
               <a:t>Fifth level</a:t>
             </a:r>
-            <a:endParaRPr lang="en-US"/>
           </a:p>
         </p:txBody>
       </p:sp>
@@ -1660,10 +1667,9 @@
           <a:lstStyle/>
           <a:p>
             <a:r>
-              <a:rPr lang="en-US" smtClean="0"/>
+              <a:rPr lang="en-US"/>
               <a:t>Feb 21, 2014</a:t>
             </a:r>
-            <a:endParaRPr lang="en-US"/>
           </a:p>
         </p:txBody>
       </p:sp>
@@ -1683,7 +1689,7 @@
           <a:lstStyle/>
           <a:p>
             <a:r>
-              <a:rPr lang="de-DE" smtClean="0"/>
+              <a:rPr lang="de-DE"/>
               <a:t>CS512 | Spring 2014</a:t>
             </a:r>
             <a:endParaRPr lang="en-US"/>
@@ -1764,10 +1770,9 @@
           <a:lstStyle/>
           <a:p>
             <a:r>
-              <a:rPr lang="en-US" smtClean="0"/>
+              <a:rPr lang="en-US"/>
               <a:t>Click to edit Master title style</a:t>
             </a:r>
-            <a:endParaRPr lang="en-US"/>
           </a:p>
         </p:txBody>
       </p:sp>
@@ -1793,38 +1798,37 @@
           <a:p>
             <a:pPr lvl="0"/>
             <a:r>
-              <a:rPr lang="en-US" smtClean="0"/>
+              <a:rPr lang="en-US"/>
               <a:t>Click to edit Master text styles</a:t>
             </a:r>
           </a:p>
           <a:p>
             <a:pPr lvl="1"/>
             <a:r>
-              <a:rPr lang="en-US" smtClean="0"/>
+              <a:rPr lang="en-US"/>
               <a:t>Second level</a:t>
             </a:r>
           </a:p>
           <a:p>
             <a:pPr lvl="2"/>
             <a:r>
-              <a:rPr lang="en-US" smtClean="0"/>
+              <a:rPr lang="en-US"/>
               <a:t>Third level</a:t>
             </a:r>
           </a:p>
           <a:p>
             <a:pPr lvl="3"/>
             <a:r>
-              <a:rPr lang="en-US" smtClean="0"/>
+              <a:rPr lang="en-US"/>
               <a:t>Fourth level</a:t>
             </a:r>
           </a:p>
           <a:p>
             <a:pPr lvl="4"/>
             <a:r>
-              <a:rPr lang="en-US" smtClean="0"/>
+              <a:rPr lang="en-US"/>
               <a:t>Fifth level</a:t>
             </a:r>
-            <a:endParaRPr lang="en-US"/>
           </a:p>
         </p:txBody>
       </p:sp>
@@ -1844,10 +1848,9 @@
           <a:lstStyle/>
           <a:p>
             <a:r>
-              <a:rPr lang="en-US" smtClean="0"/>
+              <a:rPr lang="en-US"/>
               <a:t>Feb 21, 2014</a:t>
             </a:r>
-            <a:endParaRPr lang="en-US"/>
           </a:p>
         </p:txBody>
       </p:sp>
@@ -1867,7 +1870,7 @@
           <a:lstStyle/>
           <a:p>
             <a:r>
-              <a:rPr lang="de-DE" smtClean="0"/>
+              <a:rPr lang="de-DE"/>
               <a:t>CS512 | Spring 2014</a:t>
             </a:r>
             <a:endParaRPr lang="en-US"/>
@@ -1943,10 +1946,9 @@
           <a:lstStyle/>
           <a:p>
             <a:r>
-              <a:rPr lang="en-US" smtClean="0"/>
+              <a:rPr lang="en-US"/>
               <a:t>Click to edit Master title style</a:t>
             </a:r>
-            <a:endParaRPr lang="en-US"/>
           </a:p>
         </p:txBody>
       </p:sp>
@@ -1993,10 +1995,9 @@
           <a:p>
             <a:pPr lvl="0"/>
             <a:r>
-              <a:rPr lang="en-US" dirty="0" smtClean="0"/>
+              <a:rPr lang="en-US" dirty="0"/>
               <a:t>Click to edit Master text styles</a:t>
             </a:r>
-            <a:endParaRPr lang="en-US" dirty="0"/>
           </a:p>
         </p:txBody>
       </p:sp>
@@ -2016,10 +2017,9 @@
           <a:lstStyle/>
           <a:p>
             <a:r>
-              <a:rPr lang="en-US" smtClean="0"/>
+              <a:rPr lang="en-US"/>
               <a:t>Feb 21, 2014</a:t>
             </a:r>
-            <a:endParaRPr lang="en-US"/>
           </a:p>
         </p:txBody>
       </p:sp>
@@ -2039,7 +2039,7 @@
           <a:lstStyle/>
           <a:p>
             <a:r>
-              <a:rPr lang="de-DE" smtClean="0"/>
+              <a:rPr lang="de-DE"/>
               <a:t>CS512 | Spring 2014</a:t>
             </a:r>
             <a:endParaRPr lang="en-US"/>
@@ -2105,10 +2105,9 @@
           <a:p>
             <a:pPr lvl="0"/>
             <a:r>
-              <a:rPr lang="en-US" dirty="0" smtClean="0"/>
+              <a:rPr lang="en-US" dirty="0"/>
               <a:t>References</a:t>
             </a:r>
-            <a:endParaRPr lang="en-US" dirty="0"/>
           </a:p>
         </p:txBody>
       </p:sp>
@@ -2158,10 +2157,9 @@
           <a:lstStyle/>
           <a:p>
             <a:r>
-              <a:rPr lang="en-US" smtClean="0"/>
+              <a:rPr lang="en-US"/>
               <a:t>Click to edit Master title style</a:t>
             </a:r>
-            <a:endParaRPr lang="en-US"/>
           </a:p>
         </p:txBody>
       </p:sp>
@@ -2187,38 +2185,37 @@
           <a:p>
             <a:pPr lvl="0"/>
             <a:r>
-              <a:rPr lang="en-US" smtClean="0"/>
+              <a:rPr lang="en-US"/>
               <a:t>Click to edit Master text styles</a:t>
             </a:r>
           </a:p>
           <a:p>
             <a:pPr lvl="1"/>
             <a:r>
-              <a:rPr lang="en-US" smtClean="0"/>
+              <a:rPr lang="en-US"/>
               <a:t>Second level</a:t>
             </a:r>
           </a:p>
           <a:p>
             <a:pPr lvl="2"/>
             <a:r>
-              <a:rPr lang="en-US" smtClean="0"/>
+              <a:rPr lang="en-US"/>
               <a:t>Third level</a:t>
             </a:r>
           </a:p>
           <a:p>
             <a:pPr lvl="3"/>
             <a:r>
-              <a:rPr lang="en-US" smtClean="0"/>
+              <a:rPr lang="en-US"/>
               <a:t>Fourth level</a:t>
             </a:r>
           </a:p>
           <a:p>
             <a:pPr lvl="4"/>
             <a:r>
-              <a:rPr lang="en-US" smtClean="0"/>
+              <a:rPr lang="en-US"/>
               <a:t>Fifth level</a:t>
             </a:r>
-            <a:endParaRPr lang="en-US"/>
           </a:p>
         </p:txBody>
       </p:sp>
@@ -2238,10 +2235,9 @@
           <a:lstStyle/>
           <a:p>
             <a:r>
-              <a:rPr lang="en-US" smtClean="0"/>
+              <a:rPr lang="en-US"/>
               <a:t>Feb 21, 2014</a:t>
             </a:r>
-            <a:endParaRPr lang="en-US"/>
           </a:p>
         </p:txBody>
       </p:sp>
@@ -2261,7 +2257,7 @@
           <a:lstStyle/>
           <a:p>
             <a:r>
-              <a:rPr lang="de-DE" smtClean="0"/>
+              <a:rPr lang="de-DE"/>
               <a:t>CS512 | Spring 2014</a:t>
             </a:r>
             <a:endParaRPr lang="en-US"/>
@@ -2327,10 +2323,9 @@
           <a:p>
             <a:pPr lvl="0"/>
             <a:r>
-              <a:rPr lang="en-US" dirty="0" smtClean="0"/>
+              <a:rPr lang="en-US" dirty="0"/>
               <a:t>References</a:t>
             </a:r>
-            <a:endParaRPr lang="en-US" dirty="0"/>
           </a:p>
         </p:txBody>
       </p:sp>
@@ -2389,10 +2384,9 @@
           </a:lstStyle>
           <a:p>
             <a:r>
-              <a:rPr lang="en-US" smtClean="0"/>
+              <a:rPr lang="en-US"/>
               <a:t>Click to edit Master title style</a:t>
             </a:r>
-            <a:endParaRPr lang="en-US"/>
           </a:p>
         </p:txBody>
       </p:sp>
@@ -2509,7 +2503,7 @@
           <a:p>
             <a:pPr lvl="0"/>
             <a:r>
-              <a:rPr lang="en-US" smtClean="0"/>
+              <a:rPr lang="en-US"/>
               <a:t>Click to edit Master text styles</a:t>
             </a:r>
           </a:p>
@@ -2531,10 +2525,9 @@
           <a:lstStyle/>
           <a:p>
             <a:r>
-              <a:rPr lang="en-US" smtClean="0"/>
+              <a:rPr lang="en-US"/>
               <a:t>Feb 21, 2014</a:t>
             </a:r>
-            <a:endParaRPr lang="en-US"/>
           </a:p>
         </p:txBody>
       </p:sp>
@@ -2554,7 +2547,7 @@
           <a:lstStyle/>
           <a:p>
             <a:r>
-              <a:rPr lang="de-DE" smtClean="0"/>
+              <a:rPr lang="de-DE"/>
               <a:t>CS512 | Spring 2014</a:t>
             </a:r>
             <a:endParaRPr lang="en-US"/>
@@ -2630,10 +2623,9 @@
           <a:lstStyle/>
           <a:p>
             <a:r>
-              <a:rPr lang="en-US" smtClean="0"/>
+              <a:rPr lang="en-US"/>
               <a:t>Click to edit Master title style</a:t>
             </a:r>
-            <a:endParaRPr lang="en-US"/>
           </a:p>
         </p:txBody>
       </p:sp>
@@ -2687,38 +2679,37 @@
           <a:p>
             <a:pPr lvl="0"/>
             <a:r>
-              <a:rPr lang="en-US" smtClean="0"/>
+              <a:rPr lang="en-US"/>
               <a:t>Click to edit Master text styles</a:t>
             </a:r>
           </a:p>
           <a:p>
             <a:pPr lvl="1"/>
             <a:r>
-              <a:rPr lang="en-US" smtClean="0"/>
+              <a:rPr lang="en-US"/>
               <a:t>Second level</a:t>
             </a:r>
           </a:p>
           <a:p>
             <a:pPr lvl="2"/>
             <a:r>
-              <a:rPr lang="en-US" smtClean="0"/>
+              <a:rPr lang="en-US"/>
               <a:t>Third level</a:t>
             </a:r>
           </a:p>
           <a:p>
             <a:pPr lvl="3"/>
             <a:r>
-              <a:rPr lang="en-US" smtClean="0"/>
+              <a:rPr lang="en-US"/>
               <a:t>Fourth level</a:t>
             </a:r>
           </a:p>
           <a:p>
             <a:pPr lvl="4"/>
             <a:r>
-              <a:rPr lang="en-US" smtClean="0"/>
+              <a:rPr lang="en-US"/>
               <a:t>Fifth level</a:t>
             </a:r>
-            <a:endParaRPr lang="en-US"/>
           </a:p>
         </p:txBody>
       </p:sp>
@@ -2782,38 +2773,37 @@
           <a:p>
             <a:pPr lvl="0"/>
             <a:r>
-              <a:rPr lang="en-US" smtClean="0"/>
+              <a:rPr lang="en-US"/>
               <a:t>Click to edit Master text styles</a:t>
             </a:r>
           </a:p>
           <a:p>
             <a:pPr lvl="1"/>
             <a:r>
-              <a:rPr lang="en-US" smtClean="0"/>
+              <a:rPr lang="en-US"/>
               <a:t>Second level</a:t>
             </a:r>
           </a:p>
           <a:p>
             <a:pPr lvl="2"/>
             <a:r>
-              <a:rPr lang="en-US" smtClean="0"/>
+              <a:rPr lang="en-US"/>
               <a:t>Third level</a:t>
             </a:r>
           </a:p>
           <a:p>
             <a:pPr lvl="3"/>
             <a:r>
-              <a:rPr lang="en-US" smtClean="0"/>
+              <a:rPr lang="en-US"/>
               <a:t>Fourth level</a:t>
             </a:r>
           </a:p>
           <a:p>
             <a:pPr lvl="4"/>
             <a:r>
-              <a:rPr lang="en-US" smtClean="0"/>
+              <a:rPr lang="en-US"/>
               <a:t>Fifth level</a:t>
             </a:r>
-            <a:endParaRPr lang="en-US"/>
           </a:p>
         </p:txBody>
       </p:sp>
@@ -2833,10 +2823,9 @@
           <a:lstStyle/>
           <a:p>
             <a:r>
-              <a:rPr lang="en-US" smtClean="0"/>
+              <a:rPr lang="en-US"/>
               <a:t>Feb 21, 2014</a:t>
             </a:r>
-            <a:endParaRPr lang="en-US"/>
           </a:p>
         </p:txBody>
       </p:sp>
@@ -2856,7 +2845,7 @@
           <a:lstStyle/>
           <a:p>
             <a:r>
-              <a:rPr lang="de-DE" smtClean="0"/>
+              <a:rPr lang="de-DE"/>
               <a:t>CS512 | Spring 2014</a:t>
             </a:r>
             <a:endParaRPr lang="en-US"/>
@@ -2936,10 +2925,9 @@
           </a:lstStyle>
           <a:p>
             <a:r>
-              <a:rPr lang="en-US" smtClean="0"/>
+              <a:rPr lang="en-US"/>
               <a:t>Click to edit Master title style</a:t>
             </a:r>
-            <a:endParaRPr lang="en-US"/>
           </a:p>
         </p:txBody>
       </p:sp>
@@ -3002,7 +2990,7 @@
           <a:p>
             <a:pPr lvl="0"/>
             <a:r>
-              <a:rPr lang="en-US" smtClean="0"/>
+              <a:rPr lang="en-US"/>
               <a:t>Click to edit Master text styles</a:t>
             </a:r>
           </a:p>
@@ -3058,38 +3046,37 @@
           <a:p>
             <a:pPr lvl="0"/>
             <a:r>
-              <a:rPr lang="en-US" smtClean="0"/>
+              <a:rPr lang="en-US"/>
               <a:t>Click to edit Master text styles</a:t>
             </a:r>
           </a:p>
           <a:p>
             <a:pPr lvl="1"/>
             <a:r>
-              <a:rPr lang="en-US" smtClean="0"/>
+              <a:rPr lang="en-US"/>
               <a:t>Second level</a:t>
             </a:r>
           </a:p>
           <a:p>
             <a:pPr lvl="2"/>
             <a:r>
-              <a:rPr lang="en-US" smtClean="0"/>
+              <a:rPr lang="en-US"/>
               <a:t>Third level</a:t>
             </a:r>
           </a:p>
           <a:p>
             <a:pPr lvl="3"/>
             <a:r>
-              <a:rPr lang="en-US" smtClean="0"/>
+              <a:rPr lang="en-US"/>
               <a:t>Fourth level</a:t>
             </a:r>
           </a:p>
           <a:p>
             <a:pPr lvl="4"/>
             <a:r>
-              <a:rPr lang="en-US" smtClean="0"/>
+              <a:rPr lang="en-US"/>
               <a:t>Fifth level</a:t>
             </a:r>
-            <a:endParaRPr lang="en-US"/>
           </a:p>
         </p:txBody>
       </p:sp>
@@ -3152,7 +3139,7 @@
           <a:p>
             <a:pPr lvl="0"/>
             <a:r>
-              <a:rPr lang="en-US" smtClean="0"/>
+              <a:rPr lang="en-US"/>
               <a:t>Click to edit Master text styles</a:t>
             </a:r>
           </a:p>
@@ -3208,38 +3195,37 @@
           <a:p>
             <a:pPr lvl="0"/>
             <a:r>
-              <a:rPr lang="en-US" smtClean="0"/>
+              <a:rPr lang="en-US"/>
               <a:t>Click to edit Master text styles</a:t>
             </a:r>
           </a:p>
           <a:p>
             <a:pPr lvl="1"/>
             <a:r>
-              <a:rPr lang="en-US" smtClean="0"/>
+              <a:rPr lang="en-US"/>
               <a:t>Second level</a:t>
             </a:r>
           </a:p>
           <a:p>
             <a:pPr lvl="2"/>
             <a:r>
-              <a:rPr lang="en-US" smtClean="0"/>
+              <a:rPr lang="en-US"/>
               <a:t>Third level</a:t>
             </a:r>
           </a:p>
           <a:p>
             <a:pPr lvl="3"/>
             <a:r>
-              <a:rPr lang="en-US" smtClean="0"/>
+              <a:rPr lang="en-US"/>
               <a:t>Fourth level</a:t>
             </a:r>
           </a:p>
           <a:p>
             <a:pPr lvl="4"/>
             <a:r>
-              <a:rPr lang="en-US" smtClean="0"/>
+              <a:rPr lang="en-US"/>
               <a:t>Fifth level</a:t>
             </a:r>
-            <a:endParaRPr lang="en-US"/>
           </a:p>
         </p:txBody>
       </p:sp>
@@ -3259,10 +3245,9 @@
           <a:lstStyle/>
           <a:p>
             <a:r>
-              <a:rPr lang="en-US" smtClean="0"/>
+              <a:rPr lang="en-US"/>
               <a:t>Feb 21, 2014</a:t>
             </a:r>
-            <a:endParaRPr lang="en-US"/>
           </a:p>
         </p:txBody>
       </p:sp>
@@ -3282,7 +3267,7 @@
           <a:lstStyle/>
           <a:p>
             <a:r>
-              <a:rPr lang="de-DE" smtClean="0"/>
+              <a:rPr lang="de-DE"/>
               <a:t>CS512 | Spring 2014</a:t>
             </a:r>
             <a:endParaRPr lang="en-US"/>
@@ -3358,10 +3343,9 @@
           <a:lstStyle/>
           <a:p>
             <a:r>
-              <a:rPr lang="en-US" smtClean="0"/>
+              <a:rPr lang="en-US"/>
               <a:t>Click to edit Master title style</a:t>
             </a:r>
-            <a:endParaRPr lang="en-US"/>
           </a:p>
         </p:txBody>
       </p:sp>
@@ -3381,10 +3365,9 @@
           <a:lstStyle/>
           <a:p>
             <a:r>
-              <a:rPr lang="en-US" smtClean="0"/>
+              <a:rPr lang="en-US"/>
               <a:t>Feb 21, 2014</a:t>
             </a:r>
-            <a:endParaRPr lang="en-US"/>
           </a:p>
         </p:txBody>
       </p:sp>
@@ -3404,7 +3387,7 @@
           <a:lstStyle/>
           <a:p>
             <a:r>
-              <a:rPr lang="de-DE" smtClean="0"/>
+              <a:rPr lang="de-DE"/>
               <a:t>CS512 | Spring 2014</a:t>
             </a:r>
             <a:endParaRPr lang="en-US"/>
@@ -3480,10 +3463,9 @@
           <a:lstStyle/>
           <a:p>
             <a:r>
-              <a:rPr lang="en-US" smtClean="0"/>
+              <a:rPr lang="en-US"/>
               <a:t>Feb 21, 2014</a:t>
             </a:r>
-            <a:endParaRPr lang="en-US"/>
           </a:p>
         </p:txBody>
       </p:sp>
@@ -3503,7 +3485,7 @@
           <a:lstStyle/>
           <a:p>
             <a:r>
-              <a:rPr lang="de-DE" smtClean="0"/>
+              <a:rPr lang="de-DE"/>
               <a:t>CS512 | Spring 2014</a:t>
             </a:r>
             <a:endParaRPr lang="en-US"/>
@@ -3588,10 +3570,9 @@
           </a:lstStyle>
           <a:p>
             <a:r>
-              <a:rPr lang="en-US" smtClean="0"/>
+              <a:rPr lang="en-US"/>
               <a:t>Click to edit Master title style</a:t>
             </a:r>
-            <a:endParaRPr lang="en-US"/>
           </a:p>
         </p:txBody>
       </p:sp>
@@ -3645,38 +3626,37 @@
           <a:p>
             <a:pPr lvl="0"/>
             <a:r>
-              <a:rPr lang="en-US" smtClean="0"/>
+              <a:rPr lang="en-US"/>
               <a:t>Click to edit Master text styles</a:t>
             </a:r>
           </a:p>
           <a:p>
             <a:pPr lvl="1"/>
             <a:r>
-              <a:rPr lang="en-US" smtClean="0"/>
+              <a:rPr lang="en-US"/>
               <a:t>Second level</a:t>
             </a:r>
           </a:p>
           <a:p>
             <a:pPr lvl="2"/>
             <a:r>
-              <a:rPr lang="en-US" smtClean="0"/>
+              <a:rPr lang="en-US"/>
               <a:t>Third level</a:t>
             </a:r>
           </a:p>
           <a:p>
             <a:pPr lvl="3"/>
             <a:r>
-              <a:rPr lang="en-US" smtClean="0"/>
+              <a:rPr lang="en-US"/>
               <a:t>Fourth level</a:t>
             </a:r>
           </a:p>
           <a:p>
             <a:pPr lvl="4"/>
             <a:r>
-              <a:rPr lang="en-US" smtClean="0"/>
+              <a:rPr lang="en-US"/>
               <a:t>Fifth level</a:t>
             </a:r>
-            <a:endParaRPr lang="en-US"/>
           </a:p>
         </p:txBody>
       </p:sp>
@@ -3739,7 +3719,7 @@
           <a:p>
             <a:pPr lvl="0"/>
             <a:r>
-              <a:rPr lang="en-US" smtClean="0"/>
+              <a:rPr lang="en-US"/>
               <a:t>Click to edit Master text styles</a:t>
             </a:r>
           </a:p>
@@ -3761,10 +3741,9 @@
           <a:lstStyle/>
           <a:p>
             <a:r>
-              <a:rPr lang="en-US" smtClean="0"/>
+              <a:rPr lang="en-US"/>
               <a:t>Feb 21, 2014</a:t>
             </a:r>
-            <a:endParaRPr lang="en-US"/>
           </a:p>
         </p:txBody>
       </p:sp>
@@ -3784,7 +3763,7 @@
           <a:lstStyle/>
           <a:p>
             <a:r>
-              <a:rPr lang="de-DE" smtClean="0"/>
+              <a:rPr lang="de-DE"/>
               <a:t>CS512 | Spring 2014</a:t>
             </a:r>
             <a:endParaRPr lang="en-US"/>
@@ -3875,10 +3854,9 @@
           <a:lstStyle/>
           <a:p>
             <a:r>
-              <a:rPr lang="en-US" smtClean="0"/>
+              <a:rPr lang="en-US"/>
               <a:t>Click to edit Master title style</a:t>
             </a:r>
-            <a:endParaRPr lang="en-US"/>
           </a:p>
         </p:txBody>
       </p:sp>
@@ -3909,38 +3887,37 @@
           <a:p>
             <a:pPr lvl="0"/>
             <a:r>
-              <a:rPr lang="en-US" smtClean="0"/>
+              <a:rPr lang="en-US"/>
               <a:t>Click to edit Master text styles</a:t>
             </a:r>
           </a:p>
           <a:p>
             <a:pPr lvl="1"/>
             <a:r>
-              <a:rPr lang="en-US" smtClean="0"/>
+              <a:rPr lang="en-US"/>
               <a:t>Second level</a:t>
             </a:r>
           </a:p>
           <a:p>
             <a:pPr lvl="2"/>
             <a:r>
-              <a:rPr lang="en-US" smtClean="0"/>
+              <a:rPr lang="en-US"/>
               <a:t>Third level</a:t>
             </a:r>
           </a:p>
           <a:p>
             <a:pPr lvl="3"/>
             <a:r>
-              <a:rPr lang="en-US" smtClean="0"/>
+              <a:rPr lang="en-US"/>
               <a:t>Fourth level</a:t>
             </a:r>
           </a:p>
           <a:p>
             <a:pPr lvl="4"/>
             <a:r>
-              <a:rPr lang="en-US" smtClean="0"/>
+              <a:rPr lang="en-US"/>
               <a:t>Fifth level</a:t>
             </a:r>
-            <a:endParaRPr lang="en-US"/>
           </a:p>
         </p:txBody>
       </p:sp>
@@ -3978,10 +3955,9 @@
           </a:lstStyle>
           <a:p>
             <a:r>
-              <a:rPr lang="en-US" smtClean="0"/>
+              <a:rPr lang="en-US"/>
               <a:t>Feb 21, 2014</a:t>
             </a:r>
-            <a:endParaRPr lang="en-US"/>
           </a:p>
         </p:txBody>
       </p:sp>
@@ -4019,7 +3995,7 @@
           </a:lstStyle>
           <a:p>
             <a:r>
-              <a:rPr lang="de-DE" smtClean="0"/>
+              <a:rPr lang="de-DE"/>
               <a:t>CS512 | Spring 2014</a:t>
             </a:r>
             <a:endParaRPr lang="en-US"/>
@@ -4390,14 +4366,29 @@
         </p:nvSpPr>
         <p:spPr/>
         <p:txBody>
-          <a:bodyPr/>
-          <a:lstStyle/>
-          <a:p>
-            <a:r>
-              <a:rPr lang="en-US" dirty="0" smtClean="0"/>
-              <a:t>Intro to Map-Reduce</a:t>
-            </a:r>
-            <a:endParaRPr lang="en-US" dirty="0"/>
+          <a:bodyPr>
+            <a:normAutofit/>
+          </a:bodyPr>
+          <a:lstStyle/>
+          <a:p>
+            <a:r>
+              <a:rPr lang="en-US" dirty="0"/>
+              <a:t>Introduction </a:t>
+            </a:r>
+            <a:br>
+              <a:rPr lang="en-US" dirty="0"/>
+            </a:br>
+            <a:r>
+              <a:rPr lang="en-US" dirty="0"/>
+              <a:t>to </a:t>
+            </a:r>
+            <a:br>
+              <a:rPr lang="en-US" dirty="0"/>
+            </a:br>
+            <a:r>
+              <a:rPr lang="en-US" dirty="0"/>
+              <a:t>MapReduce</a:t>
+            </a:r>
           </a:p>
         </p:txBody>
       </p:sp>
@@ -4417,10 +4408,9 @@
           <a:lstStyle/>
           <a:p>
             <a:r>
-              <a:rPr lang="en-US" dirty="0" smtClean="0"/>
+              <a:rPr lang="en-US" dirty="0"/>
               <a:t>Feb 21, 2014</a:t>
             </a:r>
-            <a:endParaRPr lang="en-US" dirty="0"/>
           </a:p>
         </p:txBody>
       </p:sp>
@@ -4434,13 +4424,6 @@
   <p:clrMapOvr>
     <a:masterClrMapping/>
   </p:clrMapOvr>
-  <p:timing>
-    <p:tnLst>
-      <p:par>
-        <p:cTn xmlns:p14="http://schemas.microsoft.com/office/powerpoint/2010/main" id="1" dur="indefinite" restart="never" nodeType="tmRoot"/>
-      </p:par>
-    </p:tnLst>
-  </p:timing>
 </p:sld>
 </file>
 
@@ -4477,10 +4460,9 @@
           <a:lstStyle/>
           <a:p>
             <a:r>
-              <a:rPr lang="en-US" dirty="0" smtClean="0"/>
+              <a:rPr lang="en-US" dirty="0"/>
               <a:t>Map</a:t>
             </a:r>
-            <a:endParaRPr lang="en-US" dirty="0"/>
           </a:p>
         </p:txBody>
       </p:sp>
@@ -4500,69 +4482,65 @@
           <a:lstStyle/>
           <a:p>
             <a:r>
-              <a:rPr lang="en-US" dirty="0" smtClean="0"/>
+              <a:rPr lang="en-US" dirty="0"/>
               <a:t>map(m</a:t>
             </a:r>
             <a:r>
-              <a:rPr lang="en-US" baseline="-25000" dirty="0" smtClean="0"/>
+              <a:rPr lang="en-US" baseline="-25000" dirty="0"/>
               <a:t>f</a:t>
             </a:r>
             <a:r>
-              <a:rPr lang="en-US" dirty="0" smtClean="0"/>
+              <a:rPr lang="en-US" dirty="0"/>
               <a:t>, [a</a:t>
             </a:r>
             <a:r>
-              <a:rPr lang="en-US" baseline="-25000" dirty="0" smtClean="0"/>
+              <a:rPr lang="en-US" baseline="-25000" dirty="0"/>
               <a:t>1</a:t>
             </a:r>
             <a:r>
-              <a:rPr lang="en-US" dirty="0" smtClean="0"/>
+              <a:rPr lang="en-US" dirty="0"/>
               <a:t>, a</a:t>
             </a:r>
             <a:r>
-              <a:rPr lang="en-US" baseline="-25000" dirty="0" smtClean="0"/>
+              <a:rPr lang="en-US" baseline="-25000" dirty="0"/>
               <a:t>2</a:t>
             </a:r>
             <a:r>
-              <a:rPr lang="en-US" dirty="0" smtClean="0"/>
+              <a:rPr lang="en-US" dirty="0"/>
               <a:t>, …a</a:t>
             </a:r>
             <a:r>
-              <a:rPr lang="en-US" baseline="-25000" dirty="0" smtClean="0"/>
+              <a:rPr lang="en-US" baseline="-25000" dirty="0"/>
               <a:t>n</a:t>
             </a:r>
             <a:r>
-              <a:rPr lang="en-US" dirty="0" smtClean="0"/>
+              <a:rPr lang="en-US" dirty="0"/>
               <a:t>])</a:t>
             </a:r>
           </a:p>
           <a:p>
             <a:r>
               <a:rPr lang="en-US" dirty="0"/>
-              <a:t> </a:t>
-            </a:r>
-            <a:r>
-              <a:rPr lang="en-US" dirty="0" smtClean="0"/>
-              <a:t> -&gt;    [b</a:t>
-            </a:r>
-            <a:r>
-              <a:rPr lang="en-US" baseline="-25000" dirty="0" smtClean="0"/>
+              <a:t>  -&gt;    [b</a:t>
+            </a:r>
+            <a:r>
+              <a:rPr lang="en-US" baseline="-25000" dirty="0"/>
               <a:t>1</a:t>
             </a:r>
             <a:r>
-              <a:rPr lang="en-US" dirty="0" smtClean="0"/>
+              <a:rPr lang="en-US" dirty="0"/>
               <a:t>, b</a:t>
             </a:r>
             <a:r>
-              <a:rPr lang="en-US" baseline="-25000" dirty="0" smtClean="0"/>
+              <a:rPr lang="en-US" baseline="-25000" dirty="0"/>
               <a:t>2</a:t>
             </a:r>
             <a:r>
-              <a:rPr lang="en-US" dirty="0" smtClean="0"/>
+              <a:rPr lang="en-US" dirty="0"/>
               <a:t>, …, </a:t>
             </a:r>
             <a:r>
-              <a:rPr lang="en-US" dirty="0" err="1" smtClean="0"/>
+              <a:rPr lang="en-US" dirty="0" err="1"/>
               <a:t>b</a:t>
             </a:r>
             <a:r>
@@ -4570,16 +4548,16 @@
               <a:t>n</a:t>
             </a:r>
             <a:r>
-              <a:rPr lang="en-US" dirty="0" smtClean="0"/>
+              <a:rPr lang="en-US" dirty="0"/>
               <a:t>]</a:t>
             </a:r>
           </a:p>
           <a:p>
-            <a:endParaRPr lang="en-US" dirty="0" smtClean="0"/>
-          </a:p>
-          <a:p>
-            <a:r>
-              <a:rPr lang="en-US" sz="2200" dirty="0" smtClean="0">
+            <a:endParaRPr lang="en-US" dirty="0"/>
+          </a:p>
+          <a:p>
+            <a:r>
+              <a:rPr lang="en-US" sz="2200" dirty="0">
                 <a:solidFill>
                   <a:schemeClr val="tx1">
                     <a:lumMod val="65000"/>
@@ -4592,7 +4570,7 @@
           </a:p>
           <a:p>
             <a:r>
-              <a:rPr lang="en-US" sz="2200" dirty="0" smtClean="0">
+              <a:rPr lang="en-US" sz="2200" dirty="0">
                 <a:solidFill>
                   <a:schemeClr val="tx1">
                     <a:lumMod val="65000"/>
@@ -4621,10 +4599,9 @@
           <a:lstStyle/>
           <a:p>
             <a:r>
-              <a:rPr lang="en-US" smtClean="0"/>
+              <a:rPr lang="en-US"/>
               <a:t>Feb 21, 2014</a:t>
             </a:r>
-            <a:endParaRPr lang="en-US"/>
           </a:p>
         </p:txBody>
       </p:sp>
@@ -4644,28 +4621,9 @@
           <a:lstStyle/>
           <a:p>
             <a:r>
-              <a:rPr lang="de-DE" smtClean="0"/>
+              <a:rPr lang="de-DE"/>
               <a:t>CS512 | Spring 2014</a:t>
             </a:r>
-            <a:endParaRPr lang="en-US"/>
-          </a:p>
-        </p:txBody>
-      </p:sp>
-      <p:sp>
-        <p:nvSpPr>
-          <p:cNvPr id="6" name="Content Placeholder 5"/>
-          <p:cNvSpPr>
-            <a:spLocks noGrp="1"/>
-          </p:cNvSpPr>
-          <p:nvPr>
-            <p:ph idx="13"/>
-          </p:nvPr>
-        </p:nvSpPr>
-        <p:spPr/>
-        <p:txBody>
-          <a:bodyPr/>
-          <a:lstStyle/>
-          <a:p>
             <a:endParaRPr lang="en-US"/>
           </a:p>
         </p:txBody>
@@ -4680,13 +4638,6 @@
   <p:clrMapOvr>
     <a:masterClrMapping/>
   </p:clrMapOvr>
-  <p:timing>
-    <p:tnLst>
-      <p:par>
-        <p:cTn xmlns:p14="http://schemas.microsoft.com/office/powerpoint/2010/main" id="1" dur="indefinite" restart="never" nodeType="tmRoot"/>
-      </p:par>
-    </p:tnLst>
-  </p:timing>
 </p:sld>
 </file>
 
@@ -4723,10 +4674,9 @@
           <a:lstStyle/>
           <a:p>
             <a:r>
-              <a:rPr lang="en-US" dirty="0" smtClean="0"/>
+              <a:rPr lang="en-US" dirty="0"/>
               <a:t>Reduce</a:t>
             </a:r>
-            <a:endParaRPr lang="en-US" dirty="0"/>
           </a:p>
         </p:txBody>
       </p:sp>
@@ -4747,69 +4697,61 @@
           <a:p>
             <a:r>
               <a:rPr lang="en-US" dirty="0"/>
-              <a:t>r</a:t>
-            </a:r>
-            <a:r>
-              <a:rPr lang="en-US" dirty="0" smtClean="0"/>
-              <a:t>educe(</a:t>
+              <a:t>reduce(</a:t>
             </a:r>
             <a:r>
               <a:rPr lang="en-US" dirty="0" err="1"/>
               <a:t>r</a:t>
             </a:r>
             <a:r>
-              <a:rPr lang="en-US" baseline="-25000" dirty="0" err="1" smtClean="0"/>
+              <a:rPr lang="en-US" baseline="-25000" dirty="0" err="1"/>
               <a:t>f</a:t>
             </a:r>
             <a:r>
-              <a:rPr lang="en-US" dirty="0" smtClean="0"/>
+              <a:rPr lang="en-US" dirty="0"/>
               <a:t>, [b</a:t>
             </a:r>
             <a:r>
-              <a:rPr lang="en-US" baseline="-25000" dirty="0" smtClean="0"/>
+              <a:rPr lang="en-US" baseline="-25000" dirty="0"/>
               <a:t>1</a:t>
             </a:r>
             <a:r>
-              <a:rPr lang="en-US" dirty="0" smtClean="0"/>
+              <a:rPr lang="en-US" dirty="0"/>
               <a:t>, b</a:t>
             </a:r>
             <a:r>
-              <a:rPr lang="en-US" baseline="-25000" dirty="0" smtClean="0"/>
+              <a:rPr lang="en-US" baseline="-25000" dirty="0"/>
               <a:t>2</a:t>
             </a:r>
             <a:r>
-              <a:rPr lang="en-US" dirty="0" smtClean="0"/>
+              <a:rPr lang="en-US" dirty="0"/>
               <a:t>, …</a:t>
             </a:r>
             <a:r>
-              <a:rPr lang="en-US" dirty="0" err="1" smtClean="0"/>
+              <a:rPr lang="en-US" dirty="0" err="1"/>
               <a:t>b</a:t>
             </a:r>
             <a:r>
-              <a:rPr lang="en-US" baseline="-25000" dirty="0" err="1" smtClean="0"/>
+              <a:rPr lang="en-US" baseline="-25000" dirty="0" err="1"/>
               <a:t>n</a:t>
             </a:r>
             <a:r>
-              <a:rPr lang="en-US" dirty="0" smtClean="0"/>
+              <a:rPr lang="en-US" dirty="0"/>
               <a:t>])</a:t>
             </a:r>
           </a:p>
           <a:p>
             <a:r>
               <a:rPr lang="en-US" dirty="0"/>
-              <a:t> </a:t>
-            </a:r>
-            <a:r>
-              <a:rPr lang="en-US" dirty="0" smtClean="0"/>
-              <a:t> -&gt;    c</a:t>
-            </a:r>
-          </a:p>
-          <a:p>
-            <a:endParaRPr lang="en-US" dirty="0" smtClean="0"/>
-          </a:p>
-          <a:p>
-            <a:r>
-              <a:rPr lang="en-US" sz="2200" dirty="0" smtClean="0">
+              <a:t>  -&gt;    c</a:t>
+            </a:r>
+          </a:p>
+          <a:p>
+            <a:endParaRPr lang="en-US" dirty="0"/>
+          </a:p>
+          <a:p>
+            <a:r>
+              <a:rPr lang="en-US" sz="2200" dirty="0">
                 <a:solidFill>
                   <a:schemeClr val="tx1">
                     <a:lumMod val="65000"/>
@@ -4822,7 +4764,7 @@
           </a:p>
           <a:p>
             <a:r>
-              <a:rPr lang="en-US" sz="2200" dirty="0" smtClean="0">
+              <a:rPr lang="en-US" sz="2200" dirty="0">
                 <a:solidFill>
                   <a:schemeClr val="tx1">
                     <a:lumMod val="65000"/>
@@ -4851,10 +4793,9 @@
           <a:lstStyle/>
           <a:p>
             <a:r>
-              <a:rPr lang="en-US" smtClean="0"/>
+              <a:rPr lang="en-US"/>
               <a:t>Feb 21, 2014</a:t>
             </a:r>
-            <a:endParaRPr lang="en-US"/>
           </a:p>
         </p:txBody>
       </p:sp>
@@ -4874,28 +4815,9 @@
           <a:lstStyle/>
           <a:p>
             <a:r>
-              <a:rPr lang="de-DE" smtClean="0"/>
+              <a:rPr lang="de-DE"/>
               <a:t>CS512 | Spring 2014</a:t>
             </a:r>
-            <a:endParaRPr lang="en-US"/>
-          </a:p>
-        </p:txBody>
-      </p:sp>
-      <p:sp>
-        <p:nvSpPr>
-          <p:cNvPr id="6" name="Content Placeholder 5"/>
-          <p:cNvSpPr>
-            <a:spLocks noGrp="1"/>
-          </p:cNvSpPr>
-          <p:nvPr>
-            <p:ph idx="13"/>
-          </p:nvPr>
-        </p:nvSpPr>
-        <p:spPr/>
-        <p:txBody>
-          <a:bodyPr/>
-          <a:lstStyle/>
-          <a:p>
             <a:endParaRPr lang="en-US"/>
           </a:p>
         </p:txBody>
@@ -4910,13 +4832,6 @@
   <p:clrMapOvr>
     <a:masterClrMapping/>
   </p:clrMapOvr>
-  <p:timing>
-    <p:tnLst>
-      <p:par>
-        <p:cTn xmlns:p14="http://schemas.microsoft.com/office/powerpoint/2010/main" id="1" dur="indefinite" restart="never" nodeType="tmRoot"/>
-      </p:par>
-    </p:tnLst>
-  </p:timing>
 </p:sld>
 </file>
 
@@ -4953,10 +4868,9 @@
           <a:lstStyle/>
           <a:p>
             <a:r>
-              <a:rPr lang="en-US" dirty="0" smtClean="0"/>
+              <a:rPr lang="en-US" dirty="0"/>
               <a:t>Simple composition</a:t>
             </a:r>
-            <a:endParaRPr lang="en-US" dirty="0"/>
           </a:p>
         </p:txBody>
       </p:sp>
@@ -4976,10 +4890,9 @@
           <a:lstStyle/>
           <a:p>
             <a:r>
-              <a:rPr lang="en-US" dirty="0" smtClean="0"/>
-              <a:t>Map’s output is a list of values, which reduce can accept as one of its argument.</a:t>
-            </a:r>
-            <a:endParaRPr lang="en-US" dirty="0"/>
+              <a:rPr lang="en-US" dirty="0"/>
+              <a:t>Map’s output is a list of values, which reduce can accept as one of its arguments.</a:t>
+            </a:r>
           </a:p>
         </p:txBody>
       </p:sp>
@@ -4999,10 +4912,9 @@
           <a:lstStyle/>
           <a:p>
             <a:r>
-              <a:rPr lang="en-US" smtClean="0"/>
+              <a:rPr lang="en-US"/>
               <a:t>Feb 21, 2014</a:t>
             </a:r>
-            <a:endParaRPr lang="en-US"/>
           </a:p>
         </p:txBody>
       </p:sp>
@@ -5022,28 +4934,9 @@
           <a:lstStyle/>
           <a:p>
             <a:r>
-              <a:rPr lang="de-DE" smtClean="0"/>
+              <a:rPr lang="de-DE"/>
               <a:t>CS512 | Spring 2014</a:t>
             </a:r>
-            <a:endParaRPr lang="en-US"/>
-          </a:p>
-        </p:txBody>
-      </p:sp>
-      <p:sp>
-        <p:nvSpPr>
-          <p:cNvPr id="6" name="Content Placeholder 5"/>
-          <p:cNvSpPr>
-            <a:spLocks noGrp="1"/>
-          </p:cNvSpPr>
-          <p:nvPr>
-            <p:ph idx="13"/>
-          </p:nvPr>
-        </p:nvSpPr>
-        <p:spPr/>
-        <p:txBody>
-          <a:bodyPr/>
-          <a:lstStyle/>
-          <a:p>
             <a:endParaRPr lang="en-US"/>
           </a:p>
         </p:txBody>
@@ -5058,13 +4951,6 @@
   <p:clrMapOvr>
     <a:masterClrMapping/>
   </p:clrMapOvr>
-  <p:timing>
-    <p:tnLst>
-      <p:par>
-        <p:cTn xmlns:p14="http://schemas.microsoft.com/office/powerpoint/2010/main" id="1" dur="indefinite" restart="never" nodeType="tmRoot"/>
-      </p:par>
-    </p:tnLst>
-  </p:timing>
 </p:sld>
 </file>
 
@@ -5101,10 +4987,9 @@
           <a:lstStyle/>
           <a:p>
             <a:r>
-              <a:rPr lang="en-US" dirty="0" smtClean="0"/>
+              <a:rPr lang="en-US" dirty="0"/>
               <a:t>Analogy</a:t>
             </a:r>
-            <a:endParaRPr lang="en-US" dirty="0"/>
           </a:p>
         </p:txBody>
       </p:sp>
@@ -5130,10 +5015,9 @@
               <a:buChar char="§"/>
             </a:pPr>
             <a:r>
-              <a:rPr lang="en-US" dirty="0" smtClean="0"/>
+              <a:rPr lang="en-US" dirty="0"/>
               <a:t>Break large problem into small pieces</a:t>
             </a:r>
-            <a:endParaRPr lang="en-US" dirty="0"/>
           </a:p>
           <a:p>
             <a:pPr marL="457200" indent="-457200">
@@ -5141,19 +5025,19 @@
               <a:buChar char="§"/>
             </a:pPr>
             <a:r>
-              <a:rPr lang="en-US" dirty="0" smtClean="0"/>
+              <a:rPr lang="en-US" dirty="0"/>
               <a:t>Code </a:t>
             </a:r>
             <a:r>
-              <a:rPr lang="en-US" i="1" dirty="0" smtClean="0"/>
+              <a:rPr lang="en-US" i="1" dirty="0"/>
               <a:t>m</a:t>
             </a:r>
             <a:r>
-              <a:rPr lang="en-US" i="1" baseline="-25000" dirty="0" smtClean="0"/>
+              <a:rPr lang="en-US" i="1" baseline="-25000" dirty="0"/>
               <a:t>f</a:t>
             </a:r>
             <a:r>
-              <a:rPr lang="en-US" dirty="0" smtClean="0"/>
+              <a:rPr lang="en-US" dirty="0"/>
               <a:t> to solve one piece</a:t>
             </a:r>
           </a:p>
@@ -5163,19 +5047,19 @@
               <a:buChar char="§"/>
             </a:pPr>
             <a:r>
-              <a:rPr lang="en-US" dirty="0" smtClean="0"/>
+              <a:rPr lang="en-US" dirty="0"/>
               <a:t>Run map to apply </a:t>
             </a:r>
             <a:r>
-              <a:rPr lang="en-US" i="1" dirty="0" smtClean="0"/>
+              <a:rPr lang="en-US" i="1" dirty="0"/>
               <a:t>m</a:t>
             </a:r>
             <a:r>
-              <a:rPr lang="en-US" i="1" baseline="-25000" dirty="0" smtClean="0"/>
+              <a:rPr lang="en-US" i="1" baseline="-25000" dirty="0"/>
               <a:t>f</a:t>
             </a:r>
             <a:r>
-              <a:rPr lang="en-US" dirty="0" smtClean="0"/>
+              <a:rPr lang="en-US" dirty="0"/>
               <a:t> on the small pieces and generate nuggets of solutions</a:t>
             </a:r>
           </a:p>
@@ -5185,19 +5069,19 @@
               <a:buChar char="§"/>
             </a:pPr>
             <a:r>
-              <a:rPr lang="en-US" dirty="0" smtClean="0"/>
+              <a:rPr lang="en-US" dirty="0"/>
               <a:t>Code </a:t>
             </a:r>
             <a:r>
-              <a:rPr lang="en-US" i="1" dirty="0" err="1" smtClean="0"/>
+              <a:rPr lang="en-US" i="1" dirty="0" err="1"/>
               <a:t>r</a:t>
             </a:r>
             <a:r>
-              <a:rPr lang="en-US" i="1" baseline="-25000" dirty="0" err="1" smtClean="0"/>
+              <a:rPr lang="en-US" i="1" baseline="-25000" dirty="0" err="1"/>
               <a:t>f</a:t>
             </a:r>
             <a:r>
-              <a:rPr lang="en-US" dirty="0" smtClean="0"/>
+              <a:rPr lang="en-US" dirty="0"/>
               <a:t> to combine the nuggets</a:t>
             </a:r>
           </a:p>
@@ -5207,19 +5091,19 @@
               <a:buChar char="§"/>
             </a:pPr>
             <a:r>
-              <a:rPr lang="en-US" dirty="0" smtClean="0"/>
+              <a:rPr lang="en-US" dirty="0"/>
               <a:t>Run reduce to apply </a:t>
             </a:r>
             <a:r>
-              <a:rPr lang="en-US" i="1" dirty="0" err="1" smtClean="0"/>
+              <a:rPr lang="en-US" i="1" dirty="0" err="1"/>
               <a:t>r</a:t>
             </a:r>
             <a:r>
-              <a:rPr lang="en-US" i="1" baseline="-25000" dirty="0" err="1" smtClean="0"/>
+              <a:rPr lang="en-US" i="1" baseline="-25000" dirty="0" err="1"/>
               <a:t>f</a:t>
             </a:r>
             <a:r>
-              <a:rPr lang="en-US" dirty="0" smtClean="0"/>
+              <a:rPr lang="en-US" dirty="0"/>
               <a:t> on the nuggets to output the complete solution</a:t>
             </a:r>
           </a:p>
@@ -5241,10 +5125,9 @@
           <a:lstStyle/>
           <a:p>
             <a:r>
-              <a:rPr lang="en-US" smtClean="0"/>
+              <a:rPr lang="en-US"/>
               <a:t>Feb 21, 2014</a:t>
             </a:r>
-            <a:endParaRPr lang="en-US"/>
           </a:p>
         </p:txBody>
       </p:sp>
@@ -5264,28 +5147,9 @@
           <a:lstStyle/>
           <a:p>
             <a:r>
-              <a:rPr lang="de-DE" smtClean="0"/>
+              <a:rPr lang="de-DE"/>
               <a:t>CS512 | Spring 2014</a:t>
             </a:r>
-            <a:endParaRPr lang="en-US"/>
-          </a:p>
-        </p:txBody>
-      </p:sp>
-      <p:sp>
-        <p:nvSpPr>
-          <p:cNvPr id="6" name="Content Placeholder 5"/>
-          <p:cNvSpPr>
-            <a:spLocks noGrp="1"/>
-          </p:cNvSpPr>
-          <p:nvPr>
-            <p:ph idx="13"/>
-          </p:nvPr>
-        </p:nvSpPr>
-        <p:spPr/>
-        <p:txBody>
-          <a:bodyPr/>
-          <a:lstStyle/>
-          <a:p>
             <a:endParaRPr lang="en-US"/>
           </a:p>
         </p:txBody>
@@ -5300,13 +5164,6 @@
   <p:clrMapOvr>
     <a:masterClrMapping/>
   </p:clrMapOvr>
-  <p:timing>
-    <p:tnLst>
-      <p:par>
-        <p:cTn xmlns:p14="http://schemas.microsoft.com/office/powerpoint/2010/main" id="1" dur="indefinite" restart="never" nodeType="tmRoot"/>
-      </p:par>
-    </p:tnLst>
-  </p:timing>
 </p:sld>
 </file>
 
@@ -5343,10 +5200,9 @@
           <a:lstStyle/>
           <a:p>
             <a:r>
-              <a:rPr lang="en-US" dirty="0" smtClean="0"/>
+              <a:rPr lang="en-US" dirty="0"/>
               <a:t>Example</a:t>
             </a:r>
-            <a:endParaRPr lang="en-US" dirty="0"/>
           </a:p>
         </p:txBody>
       </p:sp>
@@ -5366,19 +5222,19 @@
           <a:lstStyle/>
           <a:p>
             <a:r>
-              <a:rPr lang="en-US" dirty="0" smtClean="0"/>
+              <a:rPr lang="en-US" dirty="0"/>
               <a:t>1TB file split into 100,000 chunks</a:t>
             </a:r>
           </a:p>
           <a:p>
             <a:r>
-              <a:rPr lang="en-US" dirty="0" smtClean="0"/>
+              <a:rPr lang="en-US" dirty="0"/>
               <a:t>Count number of lines in each chunk</a:t>
             </a:r>
           </a:p>
           <a:p>
             <a:r>
-              <a:rPr lang="en-US" dirty="0" smtClean="0"/>
+              <a:rPr lang="en-US" dirty="0"/>
               <a:t>Add counts together to output final line count</a:t>
             </a:r>
           </a:p>
@@ -5400,10 +5256,9 @@
           <a:lstStyle/>
           <a:p>
             <a:r>
-              <a:rPr lang="en-US" smtClean="0"/>
+              <a:rPr lang="en-US"/>
               <a:t>Feb 21, 2014</a:t>
             </a:r>
-            <a:endParaRPr lang="en-US"/>
           </a:p>
         </p:txBody>
       </p:sp>
@@ -5423,28 +5278,9 @@
           <a:lstStyle/>
           <a:p>
             <a:r>
-              <a:rPr lang="de-DE" smtClean="0"/>
+              <a:rPr lang="de-DE"/>
               <a:t>CS512 | Spring 2014</a:t>
             </a:r>
-            <a:endParaRPr lang="en-US"/>
-          </a:p>
-        </p:txBody>
-      </p:sp>
-      <p:sp>
-        <p:nvSpPr>
-          <p:cNvPr id="6" name="Content Placeholder 5"/>
-          <p:cNvSpPr>
-            <a:spLocks noGrp="1"/>
-          </p:cNvSpPr>
-          <p:nvPr>
-            <p:ph idx="13"/>
-          </p:nvPr>
-        </p:nvSpPr>
-        <p:spPr/>
-        <p:txBody>
-          <a:bodyPr/>
-          <a:lstStyle/>
-          <a:p>
             <a:endParaRPr lang="en-US"/>
           </a:p>
         </p:txBody>
@@ -5459,13 +5295,6 @@
   <p:clrMapOvr>
     <a:masterClrMapping/>
   </p:clrMapOvr>
-  <p:timing>
-    <p:tnLst>
-      <p:par>
-        <p:cTn xmlns:p14="http://schemas.microsoft.com/office/powerpoint/2010/main" id="1" dur="indefinite" restart="never" nodeType="tmRoot"/>
-      </p:par>
-    </p:tnLst>
-  </p:timing>
 </p:sld>
 </file>
 
@@ -5502,10 +5331,9 @@
           <a:lstStyle/>
           <a:p>
             <a:r>
-              <a:rPr lang="en-US" dirty="0" smtClean="0"/>
+              <a:rPr lang="en-US" dirty="0"/>
               <a:t>A slightly different map-reduce</a:t>
             </a:r>
-            <a:endParaRPr lang="en-US" dirty="0"/>
           </a:p>
         </p:txBody>
       </p:sp>
@@ -5527,26 +5355,26 @@
           <a:lstStyle/>
           <a:p>
             <a:r>
-              <a:rPr lang="en-US" i="1" dirty="0" smtClean="0"/>
+              <a:rPr lang="en-US" b="1" i="1" dirty="0"/>
               <a:t>Map</a:t>
             </a:r>
           </a:p>
           <a:p>
             <a:r>
-              <a:rPr lang="en-US" dirty="0" smtClean="0"/>
+              <a:rPr lang="en-US" dirty="0"/>
               <a:t>Copies a function on a number of machines and applies each copy on different pieces of the input</a:t>
             </a:r>
           </a:p>
           <a:p>
             <a:r>
-              <a:rPr lang="en-US" i="1" dirty="0" smtClean="0"/>
+              <a:rPr lang="en-US" b="1" i="1" dirty="0"/>
               <a:t>Reduce</a:t>
             </a:r>
-            <a:endParaRPr lang="en-US" dirty="0" smtClean="0"/>
-          </a:p>
-          <a:p>
-            <a:r>
-              <a:rPr lang="en-US" dirty="0" smtClean="0"/>
+            <a:endParaRPr lang="en-US" b="1" dirty="0"/>
+          </a:p>
+          <a:p>
+            <a:r>
+              <a:rPr lang="en-US" dirty="0"/>
               <a:t>Combine the map outputs from different machines into a final solution</a:t>
             </a:r>
           </a:p>
@@ -5568,10 +5396,9 @@
           <a:lstStyle/>
           <a:p>
             <a:r>
-              <a:rPr lang="en-US" smtClean="0"/>
+              <a:rPr lang="en-US"/>
               <a:t>Feb 21, 2014</a:t>
             </a:r>
-            <a:endParaRPr lang="en-US"/>
           </a:p>
         </p:txBody>
       </p:sp>
@@ -5591,28 +5418,9 @@
           <a:lstStyle/>
           <a:p>
             <a:r>
-              <a:rPr lang="de-DE" smtClean="0"/>
+              <a:rPr lang="de-DE"/>
               <a:t>CS512 | Spring 2014</a:t>
             </a:r>
-            <a:endParaRPr lang="en-US"/>
-          </a:p>
-        </p:txBody>
-      </p:sp>
-      <p:sp>
-        <p:nvSpPr>
-          <p:cNvPr id="6" name="Content Placeholder 5"/>
-          <p:cNvSpPr>
-            <a:spLocks noGrp="1"/>
-          </p:cNvSpPr>
-          <p:nvPr>
-            <p:ph idx="13"/>
-          </p:nvPr>
-        </p:nvSpPr>
-        <p:spPr/>
-        <p:txBody>
-          <a:bodyPr/>
-          <a:lstStyle/>
-          <a:p>
             <a:endParaRPr lang="en-US"/>
           </a:p>
         </p:txBody>
@@ -5627,13 +5435,6 @@
   <p:clrMapOvr>
     <a:masterClrMapping/>
   </p:clrMapOvr>
-  <p:timing>
-    <p:tnLst>
-      <p:par>
-        <p:cTn xmlns:p14="http://schemas.microsoft.com/office/powerpoint/2010/main" id="1" dur="indefinite" restart="never" nodeType="tmRoot"/>
-      </p:par>
-    </p:tnLst>
-  </p:timing>
 </p:sld>
 </file>
 
@@ -5670,39 +5471,38 @@
           <a:lstStyle/>
           <a:p>
             <a:r>
-              <a:rPr lang="en-US" dirty="0" smtClean="0"/>
+              <a:rPr lang="en-US" dirty="0"/>
               <a:t>Map-reduce reintroduced…</a:t>
             </a:r>
+          </a:p>
+        </p:txBody>
+      </p:sp>
+      <p:sp>
+        <p:nvSpPr>
+          <p:cNvPr id="3" name="Content Placeholder 2"/>
+          <p:cNvSpPr>
+            <a:spLocks noGrp="1"/>
+          </p:cNvSpPr>
+          <p:nvPr>
+            <p:ph idx="1"/>
+          </p:nvPr>
+        </p:nvSpPr>
+        <p:spPr/>
+        <p:txBody>
+          <a:bodyPr/>
+          <a:lstStyle/>
+          <a:p>
+            <a:r>
+              <a:rPr lang="en-US" dirty="0"/>
+              <a:t>Google created the awareness</a:t>
+            </a:r>
+          </a:p>
+          <a:p>
             <a:endParaRPr lang="en-US" dirty="0"/>
           </a:p>
-        </p:txBody>
-      </p:sp>
-      <p:sp>
-        <p:nvSpPr>
-          <p:cNvPr id="3" name="Content Placeholder 2"/>
-          <p:cNvSpPr>
-            <a:spLocks noGrp="1"/>
-          </p:cNvSpPr>
-          <p:nvPr>
-            <p:ph idx="1"/>
-          </p:nvPr>
-        </p:nvSpPr>
-        <p:spPr/>
-        <p:txBody>
-          <a:bodyPr/>
-          <a:lstStyle/>
-          <a:p>
-            <a:r>
-              <a:rPr lang="en-US" dirty="0" smtClean="0"/>
-              <a:t>Google created the awareness</a:t>
-            </a:r>
-          </a:p>
-          <a:p>
-            <a:endParaRPr lang="en-US" dirty="0" smtClean="0"/>
-          </a:p>
-          <a:p>
-            <a:r>
-              <a:rPr lang="en-US" i="1" dirty="0" smtClean="0">
+          <a:p>
+            <a:r>
+              <a:rPr lang="en-US" i="1" dirty="0">
                 <a:solidFill>
                   <a:schemeClr val="accent2"/>
                 </a:solidFill>
@@ -5710,10 +5510,10 @@
               <a:t>Hadoop</a:t>
             </a:r>
             <a:r>
-              <a:rPr lang="en-US" dirty="0" smtClean="0"/>
+              <a:rPr lang="en-US" dirty="0"/>
               <a:t> made it into a sensation</a:t>
             </a:r>
-            <a:endParaRPr lang="en-US" dirty="0" smtClean="0">
+            <a:endParaRPr lang="en-US" dirty="0">
               <a:solidFill>
                 <a:schemeClr val="accent2"/>
               </a:solidFill>
@@ -5721,7 +5521,7 @@
           </a:p>
           <a:p>
             <a:r>
-              <a:rPr lang="en-US" sz="2200" i="1" dirty="0" smtClean="0">
+              <a:rPr lang="en-US" sz="2200" i="1" dirty="0">
                 <a:solidFill>
                   <a:schemeClr val="tx1">
                     <a:lumMod val="65000"/>
@@ -5732,7 +5532,7 @@
               <a:t>Hadoop </a:t>
             </a:r>
             <a:r>
-              <a:rPr lang="en-US" sz="2200" dirty="0" smtClean="0">
+              <a:rPr lang="en-US" sz="2200" dirty="0">
                 <a:solidFill>
                   <a:schemeClr val="tx1">
                     <a:lumMod val="65000"/>
@@ -5769,10 +5569,9 @@
           <a:lstStyle/>
           <a:p>
             <a:r>
-              <a:rPr lang="en-US" smtClean="0"/>
+              <a:rPr lang="en-US"/>
               <a:t>Feb 21, 2014</a:t>
             </a:r>
-            <a:endParaRPr lang="en-US"/>
           </a:p>
         </p:txBody>
       </p:sp>
@@ -5792,7 +5591,7 @@
           <a:lstStyle/>
           <a:p>
             <a:r>
-              <a:rPr lang="de-DE" smtClean="0"/>
+              <a:rPr lang="de-DE"/>
               <a:t>CS512 | Spring 2014</a:t>
             </a:r>
             <a:endParaRPr lang="en-US"/>
@@ -5817,27 +5616,26 @@
           <a:lstStyle/>
           <a:p>
             <a:r>
-              <a:rPr lang="en-US" dirty="0" smtClean="0"/>
+              <a:rPr lang="en-US" dirty="0"/>
               <a:t>MapReduce: Simplified Data Processing on Large Clusters</a:t>
             </a:r>
           </a:p>
           <a:p>
             <a:r>
-              <a:rPr lang="en-US" dirty="0" smtClean="0"/>
+              <a:rPr lang="en-US" dirty="0"/>
               <a:t>Jeffrey Dean and Sanjay </a:t>
             </a:r>
             <a:r>
-              <a:rPr lang="en-US" dirty="0" err="1" smtClean="0"/>
+              <a:rPr lang="en-US" dirty="0" err="1"/>
               <a:t>Ghemawat</a:t>
             </a:r>
-            <a:endParaRPr lang="en-US" dirty="0" smtClean="0"/>
-          </a:p>
-          <a:p>
-            <a:r>
-              <a:rPr lang="en-US" dirty="0" smtClean="0"/>
+            <a:endParaRPr lang="en-US" dirty="0"/>
+          </a:p>
+          <a:p>
+            <a:r>
+              <a:rPr lang="en-US" dirty="0"/>
               <a:t>OSDI'04: Sixth Symposium on Operating System Design and Implementation. December, 2004.</a:t>
             </a:r>
-            <a:endParaRPr lang="en-US" dirty="0"/>
           </a:p>
         </p:txBody>
       </p:sp>
@@ -5851,13 +5649,6 @@
   <p:clrMapOvr>
     <a:masterClrMapping/>
   </p:clrMapOvr>
-  <p:timing>
-    <p:tnLst>
-      <p:par>
-        <p:cTn xmlns:p14="http://schemas.microsoft.com/office/powerpoint/2010/main" id="1" dur="indefinite" restart="never" nodeType="tmRoot"/>
-      </p:par>
-    </p:tnLst>
-  </p:timing>
 </p:sld>
 </file>
 
@@ -5894,10 +5685,9 @@
           <a:lstStyle/>
           <a:p>
             <a:r>
-              <a:rPr lang="en-US" dirty="0" smtClean="0"/>
+              <a:rPr lang="en-US" dirty="0"/>
               <a:t>Hadoop</a:t>
             </a:r>
-            <a:endParaRPr lang="en-US" dirty="0"/>
           </a:p>
         </p:txBody>
       </p:sp>
@@ -5917,10 +5707,9 @@
           <a:lstStyle/>
           <a:p>
             <a:r>
-              <a:rPr lang="en-US" smtClean="0"/>
+              <a:rPr lang="en-US"/>
               <a:t>Feb 21, 2014</a:t>
             </a:r>
-            <a:endParaRPr lang="en-US"/>
           </a:p>
         </p:txBody>
       </p:sp>
@@ -5940,28 +5729,9 @@
           <a:lstStyle/>
           <a:p>
             <a:r>
-              <a:rPr lang="de-DE" smtClean="0"/>
+              <a:rPr lang="de-DE"/>
               <a:t>CS512 | Spring 2014</a:t>
             </a:r>
-            <a:endParaRPr lang="en-US"/>
-          </a:p>
-        </p:txBody>
-      </p:sp>
-      <p:sp>
-        <p:nvSpPr>
-          <p:cNvPr id="6" name="Content Placeholder 5"/>
-          <p:cNvSpPr>
-            <a:spLocks noGrp="1"/>
-          </p:cNvSpPr>
-          <p:nvPr>
-            <p:ph idx="13"/>
-          </p:nvPr>
-        </p:nvSpPr>
-        <p:spPr/>
-        <p:txBody>
-          <a:bodyPr/>
-          <a:lstStyle/>
-          <a:p>
             <a:endParaRPr lang="en-US"/>
           </a:p>
         </p:txBody>
@@ -6001,13 +5771,6 @@
   <p:clrMapOvr>
     <a:masterClrMapping/>
   </p:clrMapOvr>
-  <p:timing>
-    <p:tnLst>
-      <p:par>
-        <p:cTn xmlns:p14="http://schemas.microsoft.com/office/powerpoint/2010/main" id="1" dur="indefinite" restart="never" nodeType="tmRoot"/>
-      </p:par>
-    </p:tnLst>
-  </p:timing>
 </p:sld>
 </file>
 
@@ -6044,10 +5807,9 @@
           <a:lstStyle/>
           <a:p>
             <a:r>
-              <a:rPr lang="en-US" dirty="0" smtClean="0"/>
+              <a:rPr lang="en-US" dirty="0"/>
               <a:t>Example</a:t>
             </a:r>
-            <a:endParaRPr lang="en-US" dirty="0"/>
           </a:p>
         </p:txBody>
       </p:sp>
@@ -6092,10 +5854,9 @@
           <a:lstStyle/>
           <a:p>
             <a:r>
-              <a:rPr lang="en-US" smtClean="0"/>
+              <a:rPr lang="en-US"/>
               <a:t>Feb 21, 2014</a:t>
             </a:r>
-            <a:endParaRPr lang="en-US"/>
           </a:p>
         </p:txBody>
       </p:sp>
@@ -6115,7 +5876,7 @@
           <a:lstStyle/>
           <a:p>
             <a:r>
-              <a:rPr lang="de-DE" smtClean="0"/>
+              <a:rPr lang="de-DE"/>
               <a:t>CS512 | Spring 2014</a:t>
             </a:r>
             <a:endParaRPr lang="en-US"/>
@@ -6151,13 +5912,6 @@
   <p:clrMapOvr>
     <a:masterClrMapping/>
   </p:clrMapOvr>
-  <p:timing>
-    <p:tnLst>
-      <p:par>
-        <p:cTn xmlns:p14="http://schemas.microsoft.com/office/powerpoint/2010/main" id="1" dur="indefinite" restart="never" nodeType="tmRoot"/>
-      </p:par>
-    </p:tnLst>
-  </p:timing>
 </p:sld>
 </file>
 
@@ -6194,58 +5948,52 @@
           <a:lstStyle/>
           <a:p>
             <a:r>
-              <a:rPr lang="en-US" dirty="0" smtClean="0"/>
+              <a:rPr lang="en-US" dirty="0"/>
               <a:t>Terminology</a:t>
             </a:r>
+          </a:p>
+        </p:txBody>
+      </p:sp>
+      <p:sp>
+        <p:nvSpPr>
+          <p:cNvPr id="3" name="Content Placeholder 2"/>
+          <p:cNvSpPr>
+            <a:spLocks noGrp="1"/>
+          </p:cNvSpPr>
+          <p:nvPr>
+            <p:ph idx="1"/>
+          </p:nvPr>
+        </p:nvSpPr>
+        <p:spPr/>
+        <p:txBody>
+          <a:bodyPr/>
+          <a:lstStyle/>
+          <a:p>
+            <a:r>
+              <a:rPr lang="en-US" dirty="0"/>
+              <a:t>Mapper</a:t>
+            </a:r>
+          </a:p>
+          <a:p>
+            <a:r>
+              <a:rPr lang="en-US" dirty="0"/>
+              <a:t>Instance of the map function</a:t>
+            </a:r>
+          </a:p>
+          <a:p>
             <a:endParaRPr lang="en-US" dirty="0"/>
           </a:p>
-        </p:txBody>
-      </p:sp>
-      <p:sp>
-        <p:nvSpPr>
-          <p:cNvPr id="3" name="Content Placeholder 2"/>
-          <p:cNvSpPr>
-            <a:spLocks noGrp="1"/>
-          </p:cNvSpPr>
-          <p:nvPr>
-            <p:ph idx="1"/>
-          </p:nvPr>
-        </p:nvSpPr>
-        <p:spPr/>
-        <p:txBody>
-          <a:bodyPr/>
-          <a:lstStyle/>
-          <a:p>
-            <a:r>
-              <a:rPr lang="en-US" dirty="0" smtClean="0"/>
-              <a:t>Mapper</a:t>
-            </a:r>
-          </a:p>
-          <a:p>
-            <a:r>
-              <a:rPr lang="en-US" dirty="0"/>
-              <a:t>I</a:t>
-            </a:r>
-            <a:r>
-              <a:rPr lang="en-US" dirty="0" smtClean="0"/>
-              <a:t>nstance of the map function</a:t>
-            </a:r>
-          </a:p>
-          <a:p>
-            <a:endParaRPr lang="en-US" dirty="0" smtClean="0"/>
-          </a:p>
-          <a:p>
-            <a:r>
-              <a:rPr lang="en-US" dirty="0" smtClean="0"/>
+          <a:p>
+            <a:r>
+              <a:rPr lang="en-US" dirty="0"/>
               <a:t>Reducer</a:t>
             </a:r>
           </a:p>
           <a:p>
             <a:r>
-              <a:rPr lang="en-US" dirty="0" smtClean="0"/>
+              <a:rPr lang="en-US" dirty="0"/>
               <a:t>Instance of the reduce function</a:t>
             </a:r>
-            <a:endParaRPr lang="en-US" dirty="0"/>
           </a:p>
         </p:txBody>
       </p:sp>
@@ -6265,10 +6013,9 @@
           <a:lstStyle/>
           <a:p>
             <a:r>
-              <a:rPr lang="en-US" smtClean="0"/>
+              <a:rPr lang="en-US"/>
               <a:t>Feb 21, 2014</a:t>
             </a:r>
-            <a:endParaRPr lang="en-US"/>
           </a:p>
         </p:txBody>
       </p:sp>
@@ -6288,28 +6035,9 @@
           <a:lstStyle/>
           <a:p>
             <a:r>
-              <a:rPr lang="de-DE" smtClean="0"/>
+              <a:rPr lang="de-DE"/>
               <a:t>CS512 | Spring 2014</a:t>
             </a:r>
-            <a:endParaRPr lang="en-US"/>
-          </a:p>
-        </p:txBody>
-      </p:sp>
-      <p:sp>
-        <p:nvSpPr>
-          <p:cNvPr id="6" name="Content Placeholder 5"/>
-          <p:cNvSpPr>
-            <a:spLocks noGrp="1"/>
-          </p:cNvSpPr>
-          <p:nvPr>
-            <p:ph idx="13"/>
-          </p:nvPr>
-        </p:nvSpPr>
-        <p:spPr/>
-        <p:txBody>
-          <a:bodyPr/>
-          <a:lstStyle/>
-          <a:p>
             <a:endParaRPr lang="en-US"/>
           </a:p>
         </p:txBody>
@@ -6324,13 +6052,6 @@
   <p:clrMapOvr>
     <a:masterClrMapping/>
   </p:clrMapOvr>
-  <p:timing>
-    <p:tnLst>
-      <p:par>
-        <p:cTn xmlns:p14="http://schemas.microsoft.com/office/powerpoint/2010/main" id="1" dur="indefinite" restart="never" nodeType="tmRoot"/>
-      </p:par>
-    </p:tnLst>
-  </p:timing>
 </p:sld>
 </file>
 
@@ -6367,42 +6088,40 @@
           <a:lstStyle/>
           <a:p>
             <a:r>
-              <a:rPr lang="en-US" dirty="0" smtClean="0"/>
-              <a:t>map-reduce?</a:t>
-            </a:r>
+              <a:rPr lang="en-US" dirty="0"/>
+              <a:t>MapReduce?</a:t>
+            </a:r>
+          </a:p>
+        </p:txBody>
+      </p:sp>
+      <p:sp>
+        <p:nvSpPr>
+          <p:cNvPr id="3" name="Content Placeholder 2"/>
+          <p:cNvSpPr>
+            <a:spLocks noGrp="1"/>
+          </p:cNvSpPr>
+          <p:nvPr>
+            <p:ph idx="1"/>
+          </p:nvPr>
+        </p:nvSpPr>
+        <p:spPr/>
+        <p:txBody>
+          <a:bodyPr/>
+          <a:lstStyle/>
+          <a:p>
+            <a:r>
+              <a:rPr lang="en-US" dirty="0"/>
+              <a:t>A programming model or abstraction.</a:t>
+            </a:r>
+          </a:p>
+          <a:p>
             <a:endParaRPr lang="en-US" dirty="0"/>
           </a:p>
-        </p:txBody>
-      </p:sp>
-      <p:sp>
-        <p:nvSpPr>
-          <p:cNvPr id="3" name="Content Placeholder 2"/>
-          <p:cNvSpPr>
-            <a:spLocks noGrp="1"/>
-          </p:cNvSpPr>
-          <p:nvPr>
-            <p:ph idx="1"/>
-          </p:nvPr>
-        </p:nvSpPr>
-        <p:spPr/>
-        <p:txBody>
-          <a:bodyPr/>
-          <a:lstStyle/>
-          <a:p>
-            <a:r>
-              <a:rPr lang="en-US" dirty="0" smtClean="0"/>
-              <a:t>A programming model or abstraction.</a:t>
-            </a:r>
-          </a:p>
-          <a:p>
-            <a:endParaRPr lang="en-US" dirty="0"/>
-          </a:p>
-          <a:p>
-            <a:r>
-              <a:rPr lang="en-US" dirty="0" smtClean="0"/>
+          <a:p>
+            <a:r>
+              <a:rPr lang="en-US" dirty="0"/>
               <a:t>A novel way of thinking about designing a solution to certain problems…</a:t>
             </a:r>
-            <a:endParaRPr lang="en-US" dirty="0"/>
           </a:p>
         </p:txBody>
       </p:sp>
@@ -6422,10 +6141,9 @@
           <a:lstStyle/>
           <a:p>
             <a:r>
-              <a:rPr lang="en-US" smtClean="0"/>
+              <a:rPr lang="en-US"/>
               <a:t>Feb 21, 2014</a:t>
             </a:r>
-            <a:endParaRPr lang="en-US"/>
           </a:p>
         </p:txBody>
       </p:sp>
@@ -6445,28 +6163,9 @@
           <a:lstStyle/>
           <a:p>
             <a:r>
-              <a:rPr lang="de-DE" smtClean="0"/>
+              <a:rPr lang="de-DE"/>
               <a:t>CS512 | Spring 2014</a:t>
             </a:r>
-            <a:endParaRPr lang="en-US"/>
-          </a:p>
-        </p:txBody>
-      </p:sp>
-      <p:sp>
-        <p:nvSpPr>
-          <p:cNvPr id="6" name="Content Placeholder 5"/>
-          <p:cNvSpPr>
-            <a:spLocks noGrp="1"/>
-          </p:cNvSpPr>
-          <p:nvPr>
-            <p:ph idx="13"/>
-          </p:nvPr>
-        </p:nvSpPr>
-        <p:spPr/>
-        <p:txBody>
-          <a:bodyPr/>
-          <a:lstStyle/>
-          <a:p>
             <a:endParaRPr lang="en-US"/>
           </a:p>
         </p:txBody>
@@ -6481,13 +6180,6 @@
   <p:clrMapOvr>
     <a:masterClrMapping/>
   </p:clrMapOvr>
-  <p:timing>
-    <p:tnLst>
-      <p:par>
-        <p:cTn xmlns:p14="http://schemas.microsoft.com/office/powerpoint/2010/main" id="1" dur="indefinite" restart="never" nodeType="tmRoot"/>
-      </p:par>
-    </p:tnLst>
-  </p:timing>
 </p:sld>
 </file>
 
@@ -6524,10 +6216,9 @@
           <a:lstStyle/>
           <a:p>
             <a:r>
-              <a:rPr lang="en-US" dirty="0" smtClean="0"/>
-              <a:t>Job</a:t>
-            </a:r>
-            <a:endParaRPr lang="en-US" dirty="0"/>
+              <a:rPr lang="en-US" dirty="0"/>
+              <a:t>MapReduce Job</a:t>
+            </a:r>
           </a:p>
         </p:txBody>
       </p:sp>
@@ -6541,16 +6232,58 @@
             <p:ph idx="1"/>
           </p:nvPr>
         </p:nvSpPr>
-        <p:spPr/>
-        <p:txBody>
-          <a:bodyPr/>
-          <a:lstStyle/>
-          <a:p>
-            <a:r>
-              <a:rPr lang="en-US" dirty="0" smtClean="0"/>
+        <p:spPr>
+          <a:xfrm>
+            <a:off x="457200" y="1233378"/>
+            <a:ext cx="8229600" cy="4327450"/>
+          </a:xfrm>
+        </p:spPr>
+        <p:txBody>
+          <a:bodyPr>
+            <a:normAutofit lnSpcReduction="10000"/>
+          </a:bodyPr>
+          <a:lstStyle/>
+          <a:p>
+            <a:r>
+              <a:rPr lang="en-US" dirty="0"/>
               <a:t>User’s implementation of map and reduce functions</a:t>
             </a:r>
-            <a:endParaRPr lang="en-US" dirty="0"/>
+          </a:p>
+          <a:p>
+            <a:r>
+              <a:rPr lang="en-US" dirty="0"/>
+              <a:t>Job = { </a:t>
+            </a:r>
+          </a:p>
+          <a:p>
+            <a:r>
+              <a:rPr lang="en-US" dirty="0"/>
+              <a:t>              1. INPUT,</a:t>
+            </a:r>
+          </a:p>
+          <a:p>
+            <a:r>
+              <a:rPr lang="en-US" dirty="0"/>
+              <a:t>              2. OUTPUT,</a:t>
+            </a:r>
+          </a:p>
+          <a:p>
+            <a:r>
+              <a:rPr lang="en-US" dirty="0"/>
+              <a:t>              3. map() function,</a:t>
+            </a:r>
+          </a:p>
+          <a:p>
+            <a:r>
+              <a:rPr lang="en-US" dirty="0"/>
+              <a:t>              4. reduce() function</a:t>
+            </a:r>
+          </a:p>
+          <a:p>
+            <a:r>
+              <a:rPr lang="en-US" dirty="0"/>
+              <a:t>            }</a:t>
+            </a:r>
           </a:p>
         </p:txBody>
       </p:sp>
@@ -6570,10 +6303,9 @@
           <a:lstStyle/>
           <a:p>
             <a:r>
-              <a:rPr lang="en-US" smtClean="0"/>
+              <a:rPr lang="en-US"/>
               <a:t>Feb 21, 2014</a:t>
             </a:r>
-            <a:endParaRPr lang="en-US"/>
           </a:p>
         </p:txBody>
       </p:sp>
@@ -6593,28 +6325,9 @@
           <a:lstStyle/>
           <a:p>
             <a:r>
-              <a:rPr lang="de-DE" smtClean="0"/>
+              <a:rPr lang="de-DE"/>
               <a:t>CS512 | Spring 2014</a:t>
             </a:r>
-            <a:endParaRPr lang="en-US"/>
-          </a:p>
-        </p:txBody>
-      </p:sp>
-      <p:sp>
-        <p:nvSpPr>
-          <p:cNvPr id="6" name="Content Placeholder 5"/>
-          <p:cNvSpPr>
-            <a:spLocks noGrp="1"/>
-          </p:cNvSpPr>
-          <p:nvPr>
-            <p:ph idx="13"/>
-          </p:nvPr>
-        </p:nvSpPr>
-        <p:spPr/>
-        <p:txBody>
-          <a:bodyPr/>
-          <a:lstStyle/>
-          <a:p>
             <a:endParaRPr lang="en-US"/>
           </a:p>
         </p:txBody>
@@ -6629,13 +6342,6 @@
   <p:clrMapOvr>
     <a:masterClrMapping/>
   </p:clrMapOvr>
-  <p:timing>
-    <p:tnLst>
-      <p:par>
-        <p:cTn xmlns:p14="http://schemas.microsoft.com/office/powerpoint/2010/main" id="1" dur="indefinite" restart="never" nodeType="tmRoot"/>
-      </p:par>
-    </p:tnLst>
-  </p:timing>
 </p:sld>
 </file>
 
@@ -6672,10 +6378,9 @@
           <a:lstStyle/>
           <a:p>
             <a:r>
-              <a:rPr lang="en-US" dirty="0" smtClean="0"/>
+              <a:rPr lang="en-US" dirty="0"/>
               <a:t>Splitting the input</a:t>
             </a:r>
-            <a:endParaRPr lang="en-US" dirty="0"/>
           </a:p>
         </p:txBody>
       </p:sp>
@@ -6699,7 +6404,7 @@
               <a:buChar char="§"/>
             </a:pPr>
             <a:r>
-              <a:rPr lang="en-US" dirty="0" smtClean="0"/>
+              <a:rPr lang="en-US" dirty="0"/>
               <a:t>User submits job and specifies the input files.</a:t>
             </a:r>
           </a:p>
@@ -6709,15 +6414,15 @@
               <a:buChar char="§"/>
             </a:pPr>
             <a:r>
-              <a:rPr lang="en-US" dirty="0" smtClean="0"/>
+              <a:rPr lang="en-US" dirty="0"/>
               <a:t>Input files are split into </a:t>
             </a:r>
             <a:r>
-              <a:rPr lang="en-US" i="1" dirty="0" smtClean="0"/>
+              <a:rPr lang="en-US" i="1" dirty="0"/>
               <a:t>chunks</a:t>
             </a:r>
             <a:r>
-              <a:rPr lang="en-US" dirty="0" smtClean="0"/>
+              <a:rPr lang="en-US" dirty="0"/>
               <a:t>.</a:t>
             </a:r>
           </a:p>
@@ -6727,19 +6432,19 @@
               <a:buChar char="§"/>
             </a:pPr>
             <a:r>
-              <a:rPr lang="en-US" dirty="0" smtClean="0"/>
+              <a:rPr lang="en-US" dirty="0"/>
               <a:t>Chunks are fed to the mappers typically over a </a:t>
             </a:r>
             <a:r>
-              <a:rPr lang="en-US" i="1" dirty="0" smtClean="0"/>
+              <a:rPr lang="en-US" i="1" dirty="0"/>
               <a:t>distributed </a:t>
             </a:r>
             <a:r>
-              <a:rPr lang="en-US" dirty="0" smtClean="0"/>
+              <a:rPr lang="en-US" dirty="0"/>
               <a:t>file system like </a:t>
             </a:r>
             <a:r>
-              <a:rPr lang="en-US" i="1" dirty="0" smtClean="0"/>
+              <a:rPr lang="en-US" i="1" dirty="0"/>
               <a:t>HDFS.</a:t>
             </a:r>
           </a:p>
@@ -6761,10 +6466,9 @@
           <a:lstStyle/>
           <a:p>
             <a:r>
-              <a:rPr lang="en-US" smtClean="0"/>
+              <a:rPr lang="en-US"/>
               <a:t>Feb 21, 2014</a:t>
             </a:r>
-            <a:endParaRPr lang="en-US"/>
           </a:p>
         </p:txBody>
       </p:sp>
@@ -6784,28 +6488,9 @@
           <a:lstStyle/>
           <a:p>
             <a:r>
-              <a:rPr lang="de-DE" smtClean="0"/>
+              <a:rPr lang="de-DE"/>
               <a:t>CS512 | Spring 2014</a:t>
             </a:r>
-            <a:endParaRPr lang="en-US"/>
-          </a:p>
-        </p:txBody>
-      </p:sp>
-      <p:sp>
-        <p:nvSpPr>
-          <p:cNvPr id="6" name="Content Placeholder 5"/>
-          <p:cNvSpPr>
-            <a:spLocks noGrp="1"/>
-          </p:cNvSpPr>
-          <p:nvPr>
-            <p:ph idx="13"/>
-          </p:nvPr>
-        </p:nvSpPr>
-        <p:spPr/>
-        <p:txBody>
-          <a:bodyPr/>
-          <a:lstStyle/>
-          <a:p>
             <a:endParaRPr lang="en-US"/>
           </a:p>
         </p:txBody>
@@ -6856,10 +6541,9 @@
           <a:lstStyle/>
           <a:p>
             <a:r>
-              <a:rPr lang="en-US" dirty="0" smtClean="0"/>
+              <a:rPr lang="en-US" dirty="0"/>
               <a:t>Copying the job</a:t>
             </a:r>
-            <a:endParaRPr lang="en-US" dirty="0"/>
           </a:p>
         </p:txBody>
       </p:sp>
@@ -6881,10 +6565,10 @@
           <a:lstStyle/>
           <a:p>
             <a:r>
-              <a:rPr lang="en-US" i="1" dirty="0" err="1" smtClean="0"/>
+              <a:rPr lang="en-US" i="1" dirty="0" err="1"/>
               <a:t>JobTracker</a:t>
             </a:r>
-            <a:endParaRPr lang="en-US" i="1" dirty="0" smtClean="0"/>
+            <a:endParaRPr lang="en-US" i="1" dirty="0"/>
           </a:p>
           <a:p>
             <a:pPr marL="457200" indent="-457200">
@@ -6892,7 +6576,7 @@
               <a:buChar char="§"/>
             </a:pPr>
             <a:r>
-              <a:rPr lang="en-US" dirty="0" smtClean="0"/>
+              <a:rPr lang="en-US" dirty="0"/>
               <a:t>Hadoop service that copies the map and reduce code to available machines.</a:t>
             </a:r>
           </a:p>
@@ -6902,7 +6586,7 @@
               <a:buChar char="§"/>
             </a:pPr>
             <a:r>
-              <a:rPr lang="en-US" dirty="0" smtClean="0"/>
+              <a:rPr lang="en-US" dirty="0"/>
               <a:t>Feeds the input to the mappers and connects their outputs to reducers.</a:t>
             </a:r>
           </a:p>
@@ -6924,10 +6608,9 @@
           <a:lstStyle/>
           <a:p>
             <a:r>
-              <a:rPr lang="en-US" smtClean="0"/>
+              <a:rPr lang="en-US"/>
               <a:t>Feb 21, 2014</a:t>
             </a:r>
-            <a:endParaRPr lang="en-US"/>
           </a:p>
         </p:txBody>
       </p:sp>
@@ -6947,28 +6630,9 @@
           <a:lstStyle/>
           <a:p>
             <a:r>
-              <a:rPr lang="de-DE" smtClean="0"/>
+              <a:rPr lang="de-DE"/>
               <a:t>CS512 | Spring 2014</a:t>
             </a:r>
-            <a:endParaRPr lang="en-US"/>
-          </a:p>
-        </p:txBody>
-      </p:sp>
-      <p:sp>
-        <p:nvSpPr>
-          <p:cNvPr id="6" name="Content Placeholder 5"/>
-          <p:cNvSpPr>
-            <a:spLocks noGrp="1"/>
-          </p:cNvSpPr>
-          <p:nvPr>
-            <p:ph idx="13"/>
-          </p:nvPr>
-        </p:nvSpPr>
-        <p:spPr/>
-        <p:txBody>
-          <a:bodyPr/>
-          <a:lstStyle/>
-          <a:p>
             <a:endParaRPr lang="en-US"/>
           </a:p>
         </p:txBody>
@@ -7019,10 +6683,9 @@
           <a:lstStyle/>
           <a:p>
             <a:r>
-              <a:rPr lang="en-US" dirty="0" smtClean="0"/>
+              <a:rPr lang="en-US" dirty="0"/>
               <a:t>Maps in parallel</a:t>
             </a:r>
-            <a:endParaRPr lang="en-US" dirty="0"/>
           </a:p>
         </p:txBody>
       </p:sp>
@@ -7046,7 +6709,7 @@
               <a:buChar char="§"/>
             </a:pPr>
             <a:r>
-              <a:rPr lang="en-US" dirty="0" smtClean="0"/>
+              <a:rPr lang="en-US" dirty="0"/>
               <a:t>Maps run in parallel.</a:t>
             </a:r>
           </a:p>
@@ -7056,8 +6719,8 @@
               <a:buChar char="§"/>
             </a:pPr>
             <a:r>
-              <a:rPr lang="en-US" dirty="0" smtClean="0"/>
-              <a:t>Each maps operates on a set of chunks assigned to it by the job tracker.</a:t>
+              <a:rPr lang="en-US" dirty="0"/>
+              <a:t>Each map operates on a set of chunks assigned to it by the job tracker.</a:t>
             </a:r>
           </a:p>
           <a:p>
@@ -7066,10 +6729,9 @@
               <a:buChar char="§"/>
             </a:pPr>
             <a:r>
-              <a:rPr lang="en-US" dirty="0" smtClean="0"/>
+              <a:rPr lang="en-US" dirty="0"/>
               <a:t>Maps write to local disk.</a:t>
             </a:r>
-            <a:endParaRPr lang="en-US" dirty="0"/>
           </a:p>
         </p:txBody>
       </p:sp>
@@ -7089,10 +6751,9 @@
           <a:lstStyle/>
           <a:p>
             <a:r>
-              <a:rPr lang="en-US" smtClean="0"/>
+              <a:rPr lang="en-US"/>
               <a:t>Feb 21, 2014</a:t>
             </a:r>
-            <a:endParaRPr lang="en-US"/>
           </a:p>
         </p:txBody>
       </p:sp>
@@ -7112,28 +6773,9 @@
           <a:lstStyle/>
           <a:p>
             <a:r>
-              <a:rPr lang="de-DE" smtClean="0"/>
+              <a:rPr lang="de-DE"/>
               <a:t>CS512 | Spring 2014</a:t>
             </a:r>
-            <a:endParaRPr lang="en-US"/>
-          </a:p>
-        </p:txBody>
-      </p:sp>
-      <p:sp>
-        <p:nvSpPr>
-          <p:cNvPr id="6" name="Content Placeholder 5"/>
-          <p:cNvSpPr>
-            <a:spLocks noGrp="1"/>
-          </p:cNvSpPr>
-          <p:nvPr>
-            <p:ph idx="13"/>
-          </p:nvPr>
-        </p:nvSpPr>
-        <p:spPr/>
-        <p:txBody>
-          <a:bodyPr/>
-          <a:lstStyle/>
-          <a:p>
             <a:endParaRPr lang="en-US"/>
           </a:p>
         </p:txBody>
@@ -7184,53 +6826,52 @@
           <a:lstStyle/>
           <a:p>
             <a:r>
-              <a:rPr lang="en-US" dirty="0" smtClean="0"/>
+              <a:rPr lang="en-US" dirty="0"/>
               <a:t>What if maps fail?</a:t>
             </a:r>
+          </a:p>
+        </p:txBody>
+      </p:sp>
+      <p:sp>
+        <p:nvSpPr>
+          <p:cNvPr id="3" name="Content Placeholder 2"/>
+          <p:cNvSpPr>
+            <a:spLocks noGrp="1"/>
+          </p:cNvSpPr>
+          <p:nvPr>
+            <p:ph idx="1"/>
+          </p:nvPr>
+        </p:nvSpPr>
+        <p:spPr/>
+        <p:txBody>
+          <a:bodyPr/>
+          <a:lstStyle/>
+          <a:p>
+            <a:r>
+              <a:rPr lang="en-US" dirty="0"/>
+              <a:t>Re-run failed maps. No need to re-run maps that already succeeded.</a:t>
+            </a:r>
+          </a:p>
+          <a:p>
             <a:endParaRPr lang="en-US" dirty="0"/>
           </a:p>
-        </p:txBody>
-      </p:sp>
-      <p:sp>
-        <p:nvSpPr>
-          <p:cNvPr id="3" name="Content Placeholder 2"/>
-          <p:cNvSpPr>
-            <a:spLocks noGrp="1"/>
-          </p:cNvSpPr>
-          <p:nvPr>
-            <p:ph idx="1"/>
-          </p:nvPr>
-        </p:nvSpPr>
-        <p:spPr/>
-        <p:txBody>
-          <a:bodyPr/>
-          <a:lstStyle/>
-          <a:p>
-            <a:r>
-              <a:rPr lang="en-US" dirty="0" smtClean="0"/>
-              <a:t>Re-run failed maps. No need to re-run succeeded maps.</a:t>
-            </a:r>
-          </a:p>
-          <a:p>
-            <a:endParaRPr lang="en-US" dirty="0" smtClean="0"/>
-          </a:p>
-          <a:p>
-            <a:r>
-              <a:rPr lang="en-US" dirty="0" smtClean="0"/>
+          <a:p>
+            <a:r>
+              <a:rPr lang="en-US" dirty="0"/>
               <a:t>Why does this work?</a:t>
             </a:r>
           </a:p>
           <a:p>
             <a:r>
-              <a:rPr lang="en-US" dirty="0" smtClean="0"/>
+              <a:rPr lang="en-US" dirty="0"/>
               <a:t>Maps typically are </a:t>
             </a:r>
             <a:r>
-              <a:rPr lang="en-US" i="1" dirty="0" smtClean="0"/>
+              <a:rPr lang="en-US" i="1" dirty="0"/>
               <a:t>idempotent</a:t>
             </a:r>
             <a:r>
-              <a:rPr lang="en-US" dirty="0" smtClean="0"/>
+              <a:rPr lang="en-US" dirty="0"/>
               <a:t>.</a:t>
             </a:r>
           </a:p>
@@ -7252,10 +6893,9 @@
           <a:lstStyle/>
           <a:p>
             <a:r>
-              <a:rPr lang="en-US" smtClean="0"/>
+              <a:rPr lang="en-US"/>
               <a:t>Feb 21, 2014</a:t>
             </a:r>
-            <a:endParaRPr lang="en-US"/>
           </a:p>
         </p:txBody>
       </p:sp>
@@ -7275,28 +6915,9 @@
           <a:lstStyle/>
           <a:p>
             <a:r>
-              <a:rPr lang="de-DE" smtClean="0"/>
+              <a:rPr lang="de-DE"/>
               <a:t>CS512 | Spring 2014</a:t>
             </a:r>
-            <a:endParaRPr lang="en-US"/>
-          </a:p>
-        </p:txBody>
-      </p:sp>
-      <p:sp>
-        <p:nvSpPr>
-          <p:cNvPr id="6" name="Content Placeholder 5"/>
-          <p:cNvSpPr>
-            <a:spLocks noGrp="1"/>
-          </p:cNvSpPr>
-          <p:nvPr>
-            <p:ph idx="13"/>
-          </p:nvPr>
-        </p:nvSpPr>
-        <p:spPr/>
-        <p:txBody>
-          <a:bodyPr/>
-          <a:lstStyle/>
-          <a:p>
             <a:endParaRPr lang="en-US"/>
           </a:p>
         </p:txBody>
@@ -7311,13 +6932,6 @@
   <p:clrMapOvr>
     <a:masterClrMapping/>
   </p:clrMapOvr>
-  <p:timing>
-    <p:tnLst>
-      <p:par>
-        <p:cTn xmlns:p14="http://schemas.microsoft.com/office/powerpoint/2010/main" id="1" dur="indefinite" restart="never" nodeType="tmRoot"/>
-      </p:par>
-    </p:tnLst>
-  </p:timing>
 </p:sld>
 </file>
 
@@ -7354,10 +6968,9 @@
           <a:lstStyle/>
           <a:p>
             <a:r>
-              <a:rPr lang="en-US" dirty="0" smtClean="0"/>
+              <a:rPr lang="en-US" dirty="0"/>
               <a:t>Input to reducers</a:t>
             </a:r>
-            <a:endParaRPr lang="en-US" dirty="0"/>
           </a:p>
         </p:txBody>
       </p:sp>
@@ -7379,7 +6992,7 @@
           <a:lstStyle/>
           <a:p>
             <a:r>
-              <a:rPr lang="en-US" i="1" dirty="0" smtClean="0"/>
+              <a:rPr lang="en-US" i="1" dirty="0"/>
               <a:t>#reducers</a:t>
             </a:r>
             <a:r>
@@ -7387,36 +7000,36 @@
               <a:t> </a:t>
             </a:r>
             <a:r>
-              <a:rPr lang="en-US" i="1" dirty="0" smtClean="0"/>
+              <a:rPr lang="en-US" i="1" dirty="0"/>
               <a:t>(n)</a:t>
             </a:r>
             <a:r>
-              <a:rPr lang="en-US" dirty="0" smtClean="0"/>
+              <a:rPr lang="en-US" dirty="0"/>
               <a:t> known a priori.</a:t>
             </a:r>
           </a:p>
           <a:p>
             <a:r>
-              <a:rPr lang="en-US" i="1" dirty="0" smtClean="0"/>
+              <a:rPr lang="en-US" i="1" dirty="0"/>
               <a:t>#partitions</a:t>
             </a:r>
             <a:r>
-              <a:rPr lang="en-US" dirty="0" smtClean="0"/>
+              <a:rPr lang="en-US" dirty="0"/>
               <a:t> equals #reducers.</a:t>
             </a:r>
           </a:p>
           <a:p>
-            <a:endParaRPr lang="en-US" dirty="0" smtClean="0"/>
-          </a:p>
-          <a:p>
-            <a:r>
-              <a:rPr lang="en-US" dirty="0" smtClean="0"/>
+            <a:endParaRPr lang="en-US" dirty="0"/>
+          </a:p>
+          <a:p>
+            <a:r>
+              <a:rPr lang="en-US" dirty="0"/>
               <a:t>Hash on the keys of mapper outputs.</a:t>
             </a:r>
           </a:p>
           <a:p>
             <a:r>
-              <a:rPr lang="en-US" sz="2200" i="1" dirty="0" smtClean="0">
+              <a:rPr lang="en-US" sz="2200" i="1" dirty="0">
                 <a:solidFill>
                   <a:schemeClr val="tx1">
                     <a:lumMod val="65000"/>
@@ -7428,11 +7041,11 @@
             </a:r>
           </a:p>
           <a:p>
-            <a:endParaRPr lang="en-US" dirty="0" smtClean="0"/>
-          </a:p>
-          <a:p>
-            <a:r>
-              <a:rPr lang="en-US" dirty="0" smtClean="0"/>
+            <a:endParaRPr lang="en-US" dirty="0"/>
+          </a:p>
+          <a:p>
+            <a:r>
+              <a:rPr lang="en-US" dirty="0"/>
               <a:t>Load balancing by randomization.</a:t>
             </a:r>
           </a:p>
@@ -7454,10 +7067,9 @@
           <a:lstStyle/>
           <a:p>
             <a:r>
-              <a:rPr lang="en-US" smtClean="0"/>
+              <a:rPr lang="en-US"/>
               <a:t>Feb 21, 2014</a:t>
             </a:r>
-            <a:endParaRPr lang="en-US"/>
           </a:p>
         </p:txBody>
       </p:sp>
@@ -7477,28 +7089,9 @@
           <a:lstStyle/>
           <a:p>
             <a:r>
-              <a:rPr lang="de-DE" smtClean="0"/>
+              <a:rPr lang="de-DE"/>
               <a:t>CS512 | Spring 2014</a:t>
             </a:r>
-            <a:endParaRPr lang="en-US"/>
-          </a:p>
-        </p:txBody>
-      </p:sp>
-      <p:sp>
-        <p:nvSpPr>
-          <p:cNvPr id="6" name="Content Placeholder 5"/>
-          <p:cNvSpPr>
-            <a:spLocks noGrp="1"/>
-          </p:cNvSpPr>
-          <p:nvPr>
-            <p:ph idx="13"/>
-          </p:nvPr>
-        </p:nvSpPr>
-        <p:spPr/>
-        <p:txBody>
-          <a:bodyPr/>
-          <a:lstStyle/>
-          <a:p>
             <a:endParaRPr lang="en-US"/>
           </a:p>
         </p:txBody>
@@ -7513,13 +7106,6 @@
   <p:clrMapOvr>
     <a:masterClrMapping/>
   </p:clrMapOvr>
-  <p:timing>
-    <p:tnLst>
-      <p:par>
-        <p:cTn xmlns:p14="http://schemas.microsoft.com/office/powerpoint/2010/main" id="1" dur="indefinite" restart="never" nodeType="tmRoot"/>
-      </p:par>
-    </p:tnLst>
-  </p:timing>
 </p:sld>
 </file>
 
@@ -7556,46 +7142,40 @@
           <a:lstStyle/>
           <a:p>
             <a:r>
-              <a:rPr lang="en-US" dirty="0" smtClean="0"/>
+              <a:rPr lang="en-US" dirty="0"/>
               <a:t>Wait before reducing…</a:t>
             </a:r>
+          </a:p>
+        </p:txBody>
+      </p:sp>
+      <p:sp>
+        <p:nvSpPr>
+          <p:cNvPr id="3" name="Content Placeholder 2"/>
+          <p:cNvSpPr>
+            <a:spLocks noGrp="1"/>
+          </p:cNvSpPr>
+          <p:nvPr>
+            <p:ph idx="1"/>
+          </p:nvPr>
+        </p:nvSpPr>
+        <p:spPr/>
+        <p:txBody>
+          <a:bodyPr/>
+          <a:lstStyle/>
+          <a:p>
+            <a:r>
+              <a:rPr lang="en-US" dirty="0"/>
+              <a:t>Cannot start reducers before mappers complete.</a:t>
+            </a:r>
+          </a:p>
+          <a:p>
             <a:endParaRPr lang="en-US" dirty="0"/>
           </a:p>
-        </p:txBody>
-      </p:sp>
-      <p:sp>
-        <p:nvSpPr>
-          <p:cNvPr id="3" name="Content Placeholder 2"/>
-          <p:cNvSpPr>
-            <a:spLocks noGrp="1"/>
-          </p:cNvSpPr>
-          <p:nvPr>
-            <p:ph idx="1"/>
-          </p:nvPr>
-        </p:nvSpPr>
-        <p:spPr/>
-        <p:txBody>
-          <a:bodyPr/>
-          <a:lstStyle/>
-          <a:p>
-            <a:r>
-              <a:rPr lang="en-US" dirty="0" smtClean="0"/>
-              <a:t>Cannot start reducers before mappers complete.</a:t>
-            </a:r>
-          </a:p>
-          <a:p>
-            <a:endParaRPr lang="en-US" dirty="0"/>
-          </a:p>
-          <a:p>
-            <a:r>
-              <a:rPr lang="en-US" dirty="0"/>
-              <a:t>S</a:t>
-            </a:r>
-            <a:r>
-              <a:rPr lang="en-US" dirty="0" smtClean="0"/>
-              <a:t>ynchronization barrier between map and reduce phases. Why?</a:t>
-            </a:r>
-            <a:endParaRPr lang="en-US" dirty="0"/>
+          <a:p>
+            <a:r>
+              <a:rPr lang="en-US" dirty="0"/>
+              <a:t>Synchronization barrier between map and reduce phases. Why?</a:t>
+            </a:r>
           </a:p>
         </p:txBody>
       </p:sp>
@@ -7615,10 +7195,9 @@
           <a:lstStyle/>
           <a:p>
             <a:r>
-              <a:rPr lang="en-US" smtClean="0"/>
+              <a:rPr lang="en-US"/>
               <a:t>Feb 21, 2014</a:t>
             </a:r>
-            <a:endParaRPr lang="en-US"/>
           </a:p>
         </p:txBody>
       </p:sp>
@@ -7638,28 +7217,9 @@
           <a:lstStyle/>
           <a:p>
             <a:r>
-              <a:rPr lang="de-DE" smtClean="0"/>
+              <a:rPr lang="de-DE"/>
               <a:t>CS512 | Spring 2014</a:t>
             </a:r>
-            <a:endParaRPr lang="en-US"/>
-          </a:p>
-        </p:txBody>
-      </p:sp>
-      <p:sp>
-        <p:nvSpPr>
-          <p:cNvPr id="6" name="Content Placeholder 5"/>
-          <p:cNvSpPr>
-            <a:spLocks noGrp="1"/>
-          </p:cNvSpPr>
-          <p:nvPr>
-            <p:ph idx="13"/>
-          </p:nvPr>
-        </p:nvSpPr>
-        <p:spPr/>
-        <p:txBody>
-          <a:bodyPr/>
-          <a:lstStyle/>
-          <a:p>
             <a:endParaRPr lang="en-US"/>
           </a:p>
         </p:txBody>
@@ -7710,10 +7270,9 @@
           <a:lstStyle/>
           <a:p>
             <a:r>
-              <a:rPr lang="en-US" dirty="0" smtClean="0"/>
+              <a:rPr lang="en-US" dirty="0"/>
               <a:t>Embarrassing Parallelism</a:t>
             </a:r>
-            <a:endParaRPr lang="en-US" dirty="0"/>
           </a:p>
         </p:txBody>
       </p:sp>
@@ -7758,10 +7317,9 @@
           <a:lstStyle/>
           <a:p>
             <a:r>
-              <a:rPr lang="en-US" smtClean="0"/>
+              <a:rPr lang="en-US"/>
               <a:t>Feb 21, 2014</a:t>
             </a:r>
-            <a:endParaRPr lang="en-US"/>
           </a:p>
         </p:txBody>
       </p:sp>
@@ -7781,28 +7339,9 @@
           <a:lstStyle/>
           <a:p>
             <a:r>
-              <a:rPr lang="de-DE" smtClean="0"/>
+              <a:rPr lang="de-DE"/>
               <a:t>CS512 | Spring 2014</a:t>
             </a:r>
-            <a:endParaRPr lang="en-US"/>
-          </a:p>
-        </p:txBody>
-      </p:sp>
-      <p:sp>
-        <p:nvSpPr>
-          <p:cNvPr id="6" name="Content Placeholder 5"/>
-          <p:cNvSpPr>
-            <a:spLocks noGrp="1"/>
-          </p:cNvSpPr>
-          <p:nvPr>
-            <p:ph idx="13"/>
-          </p:nvPr>
-        </p:nvSpPr>
-        <p:spPr/>
-        <p:txBody>
-          <a:bodyPr/>
-          <a:lstStyle/>
-          <a:p>
             <a:endParaRPr lang="en-US"/>
           </a:p>
         </p:txBody>
@@ -7853,39 +7392,38 @@
           <a:lstStyle/>
           <a:p>
             <a:r>
-              <a:rPr lang="en-US" dirty="0" smtClean="0"/>
+              <a:rPr lang="en-US" dirty="0"/>
               <a:t>Not a panacea!</a:t>
             </a:r>
+          </a:p>
+        </p:txBody>
+      </p:sp>
+      <p:sp>
+        <p:nvSpPr>
+          <p:cNvPr id="3" name="Content Placeholder 2"/>
+          <p:cNvSpPr>
+            <a:spLocks noGrp="1"/>
+          </p:cNvSpPr>
+          <p:nvPr>
+            <p:ph idx="1"/>
+          </p:nvPr>
+        </p:nvSpPr>
+        <p:spPr/>
+        <p:txBody>
+          <a:bodyPr/>
+          <a:lstStyle/>
+          <a:p>
+            <a:r>
+              <a:rPr lang="en-US" dirty="0"/>
+              <a:t>If your workload exhibits embarrassing parallelism, Hadoop might be the ideal framework.</a:t>
+            </a:r>
+          </a:p>
+          <a:p>
             <a:endParaRPr lang="en-US" dirty="0"/>
           </a:p>
-        </p:txBody>
-      </p:sp>
-      <p:sp>
-        <p:nvSpPr>
-          <p:cNvPr id="3" name="Content Placeholder 2"/>
-          <p:cNvSpPr>
-            <a:spLocks noGrp="1"/>
-          </p:cNvSpPr>
-          <p:nvPr>
-            <p:ph idx="1"/>
-          </p:nvPr>
-        </p:nvSpPr>
-        <p:spPr/>
-        <p:txBody>
-          <a:bodyPr/>
-          <a:lstStyle/>
-          <a:p>
-            <a:r>
-              <a:rPr lang="en-US" dirty="0" smtClean="0"/>
-              <a:t>If your workload exhibits embarrassing parallelism, Hadoop might be the ideal framework.</a:t>
-            </a:r>
-          </a:p>
-          <a:p>
-            <a:endParaRPr lang="en-US" dirty="0"/>
-          </a:p>
-          <a:p>
-            <a:r>
-              <a:rPr lang="en-US" dirty="0" smtClean="0"/>
+          <a:p>
+            <a:r>
+              <a:rPr lang="en-US" dirty="0"/>
               <a:t>If not, look for other parallel programming paradigms.</a:t>
             </a:r>
           </a:p>
@@ -7907,10 +7445,9 @@
           <a:lstStyle/>
           <a:p>
             <a:r>
-              <a:rPr lang="en-US" smtClean="0"/>
+              <a:rPr lang="en-US"/>
               <a:t>Feb 21, 2014</a:t>
             </a:r>
-            <a:endParaRPr lang="en-US"/>
           </a:p>
         </p:txBody>
       </p:sp>
@@ -7930,28 +7467,9 @@
           <a:lstStyle/>
           <a:p>
             <a:r>
-              <a:rPr lang="de-DE" smtClean="0"/>
+              <a:rPr lang="de-DE"/>
               <a:t>CS512 | Spring 2014</a:t>
             </a:r>
-            <a:endParaRPr lang="en-US"/>
-          </a:p>
-        </p:txBody>
-      </p:sp>
-      <p:sp>
-        <p:nvSpPr>
-          <p:cNvPr id="6" name="Content Placeholder 5"/>
-          <p:cNvSpPr>
-            <a:spLocks noGrp="1"/>
-          </p:cNvSpPr>
-          <p:nvPr>
-            <p:ph idx="13"/>
-          </p:nvPr>
-        </p:nvSpPr>
-        <p:spPr/>
-        <p:txBody>
-          <a:bodyPr/>
-          <a:lstStyle/>
-          <a:p>
             <a:endParaRPr lang="en-US"/>
           </a:p>
         </p:txBody>
@@ -8002,10 +7520,9 @@
           <a:lstStyle/>
           <a:p>
             <a:r>
-              <a:rPr lang="en-US" dirty="0" smtClean="0"/>
+              <a:rPr lang="en-US" dirty="0"/>
               <a:t>Example</a:t>
             </a:r>
-            <a:endParaRPr lang="en-US" dirty="0"/>
           </a:p>
         </p:txBody>
       </p:sp>
@@ -8024,7 +7541,10 @@
           <a:bodyPr/>
           <a:lstStyle/>
           <a:p>
-            <a:endParaRPr lang="en-US" dirty="0"/>
+            <a:r>
+              <a:rPr lang="en-US" dirty="0"/>
+              <a:t>Word Count</a:t>
+            </a:r>
           </a:p>
         </p:txBody>
       </p:sp>
@@ -8044,10 +7564,9 @@
           <a:lstStyle/>
           <a:p>
             <a:r>
-              <a:rPr lang="en-US" smtClean="0"/>
+              <a:rPr lang="en-US"/>
               <a:t>Feb 21, 2014</a:t>
             </a:r>
-            <a:endParaRPr lang="en-US"/>
           </a:p>
         </p:txBody>
       </p:sp>
@@ -8067,7 +7586,7 @@
           <a:lstStyle/>
           <a:p>
             <a:r>
-              <a:rPr lang="de-DE" smtClean="0"/>
+              <a:rPr lang="de-DE"/>
               <a:t>CS512 | Spring 2014</a:t>
             </a:r>
             <a:endParaRPr lang="en-US"/>
@@ -8103,13 +7622,6 @@
   <p:clrMapOvr>
     <a:masterClrMapping/>
   </p:clrMapOvr>
-  <p:timing>
-    <p:tnLst>
-      <p:par>
-        <p:cTn xmlns:p14="http://schemas.microsoft.com/office/powerpoint/2010/main" id="1" dur="indefinite" restart="never" nodeType="tmRoot"/>
-      </p:par>
-    </p:tnLst>
-  </p:timing>
 </p:sld>
 </file>
 
@@ -8146,10 +7658,9 @@
           <a:lstStyle/>
           <a:p>
             <a:r>
-              <a:rPr lang="en-US" dirty="0" smtClean="0"/>
+              <a:rPr lang="en-US" dirty="0"/>
               <a:t>Why?</a:t>
             </a:r>
-            <a:endParaRPr lang="en-US" dirty="0"/>
           </a:p>
         </p:txBody>
       </p:sp>
@@ -8169,13 +7680,13 @@
           <a:lstStyle/>
           <a:p>
             <a:r>
-              <a:rPr lang="en-US" dirty="0" smtClean="0"/>
+              <a:rPr lang="en-US" dirty="0"/>
               <a:t>We have access to huge volumes of data.</a:t>
             </a:r>
           </a:p>
           <a:p>
             <a:r>
-              <a:rPr lang="en-US" sz="2200" i="1" dirty="0" smtClean="0">
+              <a:rPr lang="en-US" sz="2200" i="1" dirty="0">
                 <a:solidFill>
                   <a:schemeClr val="tx1">
                     <a:lumMod val="65000"/>
@@ -8185,17 +7696,9 @@
               </a:rPr>
               <a:t>Facebook posts and photos, twitter streams, …</a:t>
             </a:r>
-            <a:endParaRPr lang="en-US" sz="2200" i="1" dirty="0">
-              <a:solidFill>
-                <a:schemeClr val="tx1">
-                  <a:lumMod val="65000"/>
-                  <a:lumOff val="35000"/>
-                </a:schemeClr>
-              </a:solidFill>
-            </a:endParaRPr>
-          </a:p>
-          <a:p>
-            <a:endParaRPr lang="en-US" dirty="0" smtClean="0"/>
+          </a:p>
+          <a:p>
+            <a:endParaRPr lang="en-US" dirty="0"/>
           </a:p>
         </p:txBody>
       </p:sp>
@@ -8215,10 +7718,9 @@
           <a:lstStyle/>
           <a:p>
             <a:r>
-              <a:rPr lang="en-US" smtClean="0"/>
+              <a:rPr lang="en-US"/>
               <a:t>Feb 21, 2014</a:t>
             </a:r>
-            <a:endParaRPr lang="en-US"/>
           </a:p>
         </p:txBody>
       </p:sp>
@@ -8238,28 +7740,9 @@
           <a:lstStyle/>
           <a:p>
             <a:r>
-              <a:rPr lang="de-DE" smtClean="0"/>
+              <a:rPr lang="de-DE"/>
               <a:t>CS512 | Spring 2014</a:t>
             </a:r>
-            <a:endParaRPr lang="en-US"/>
-          </a:p>
-        </p:txBody>
-      </p:sp>
-      <p:sp>
-        <p:nvSpPr>
-          <p:cNvPr id="6" name="Content Placeholder 5"/>
-          <p:cNvSpPr>
-            <a:spLocks noGrp="1"/>
-          </p:cNvSpPr>
-          <p:nvPr>
-            <p:ph idx="13"/>
-          </p:nvPr>
-        </p:nvSpPr>
-        <p:spPr/>
-        <p:txBody>
-          <a:bodyPr/>
-          <a:lstStyle/>
-          <a:p>
             <a:endParaRPr lang="en-US"/>
           </a:p>
         </p:txBody>
@@ -8274,13 +7757,6 @@
   <p:clrMapOvr>
     <a:masterClrMapping/>
   </p:clrMapOvr>
-  <p:timing>
-    <p:tnLst>
-      <p:par>
-        <p:cTn xmlns:p14="http://schemas.microsoft.com/office/powerpoint/2010/main" id="1" dur="indefinite" restart="never" nodeType="tmRoot"/>
-      </p:par>
-    </p:tnLst>
-  </p:timing>
 </p:sld>
 </file>
 
@@ -8303,25 +7779,6 @@
       </p:grpSpPr>
       <p:sp>
         <p:nvSpPr>
-          <p:cNvPr id="2" name="Title 1"/>
-          <p:cNvSpPr>
-            <a:spLocks noGrp="1"/>
-          </p:cNvSpPr>
-          <p:nvPr>
-            <p:ph type="title"/>
-          </p:nvPr>
-        </p:nvSpPr>
-        <p:spPr/>
-        <p:txBody>
-          <a:bodyPr/>
-          <a:lstStyle/>
-          <a:p>
-            <a:endParaRPr lang="en-US" dirty="0"/>
-          </a:p>
-        </p:txBody>
-      </p:sp>
-      <p:sp>
-        <p:nvSpPr>
           <p:cNvPr id="3" name="Content Placeholder 2"/>
           <p:cNvSpPr>
             <a:spLocks noGrp="1"/>
@@ -8330,16 +7787,538 @@
             <p:ph idx="1"/>
           </p:nvPr>
         </p:nvSpPr>
-        <p:spPr/>
-        <p:txBody>
-          <a:bodyPr/>
-          <a:lstStyle/>
-          <a:p>
-            <a:r>
-              <a:rPr lang="en-US" dirty="0" err="1" smtClean="0"/>
-              <a:t>WordCount</a:t>
-            </a:r>
-            <a:endParaRPr lang="en-US" dirty="0"/>
+        <p:spPr>
+          <a:xfrm>
+            <a:off x="457200" y="368672"/>
+            <a:ext cx="8229600" cy="4886119"/>
+          </a:xfrm>
+        </p:spPr>
+        <p:txBody>
+          <a:bodyPr>
+            <a:noAutofit/>
+          </a:bodyPr>
+          <a:lstStyle/>
+          <a:p>
+            <a:r>
+              <a:rPr lang="en-US" sz="1400" b="1" i="1" dirty="0">
+                <a:solidFill>
+                  <a:schemeClr val="tx1">
+                    <a:lumMod val="65000"/>
+                    <a:lumOff val="35000"/>
+                  </a:schemeClr>
+                </a:solidFill>
+              </a:rPr>
+              <a:t>Mapper</a:t>
+            </a:r>
+          </a:p>
+          <a:p>
+            <a:r>
+              <a:rPr lang="en-US" sz="1400" dirty="0">
+                <a:solidFill>
+                  <a:schemeClr val="tx1">
+                    <a:lumMod val="65000"/>
+                    <a:lumOff val="35000"/>
+                  </a:schemeClr>
+                </a:solidFill>
+              </a:rPr>
+              <a:t> public static class </a:t>
+            </a:r>
+            <a:r>
+              <a:rPr lang="en-US" sz="1800" dirty="0" err="1">
+                <a:solidFill>
+                  <a:schemeClr val="accent1"/>
+                </a:solidFill>
+              </a:rPr>
+              <a:t>MyMapper</a:t>
+            </a:r>
+            <a:r>
+              <a:rPr lang="en-US" sz="1400" dirty="0">
+                <a:solidFill>
+                  <a:schemeClr val="tx1">
+                    <a:lumMod val="65000"/>
+                    <a:lumOff val="35000"/>
+                  </a:schemeClr>
+                </a:solidFill>
+              </a:rPr>
+              <a:t> implements </a:t>
+            </a:r>
+            <a:r>
+              <a:rPr lang="en-US" sz="1400" i="1" dirty="0">
+                <a:solidFill>
+                  <a:schemeClr val="tx1">
+                    <a:lumMod val="65000"/>
+                    <a:lumOff val="35000"/>
+                  </a:schemeClr>
+                </a:solidFill>
+              </a:rPr>
+              <a:t>Mapper</a:t>
+            </a:r>
+            <a:r>
+              <a:rPr lang="en-US" sz="1400" dirty="0">
+                <a:solidFill>
+                  <a:schemeClr val="tx1">
+                    <a:lumMod val="65000"/>
+                    <a:lumOff val="35000"/>
+                  </a:schemeClr>
+                </a:solidFill>
+              </a:rPr>
+              <a:t>&lt;</a:t>
+            </a:r>
+            <a:r>
+              <a:rPr lang="en-US" sz="1400" dirty="0" err="1">
+                <a:solidFill>
+                  <a:schemeClr val="tx1">
+                    <a:lumMod val="65000"/>
+                    <a:lumOff val="35000"/>
+                  </a:schemeClr>
+                </a:solidFill>
+              </a:rPr>
+              <a:t>LongWritable</a:t>
+            </a:r>
+            <a:r>
+              <a:rPr lang="en-US" sz="1400" dirty="0">
+                <a:solidFill>
+                  <a:schemeClr val="tx1">
+                    <a:lumMod val="65000"/>
+                    <a:lumOff val="35000"/>
+                  </a:schemeClr>
+                </a:solidFill>
+              </a:rPr>
+              <a:t>, Text, Text, </a:t>
+            </a:r>
+            <a:r>
+              <a:rPr lang="en-US" sz="1400" dirty="0" err="1">
+                <a:solidFill>
+                  <a:schemeClr val="tx1">
+                    <a:lumMod val="65000"/>
+                    <a:lumOff val="35000"/>
+                  </a:schemeClr>
+                </a:solidFill>
+              </a:rPr>
+              <a:t>IntWritable</a:t>
+            </a:r>
+            <a:r>
+              <a:rPr lang="en-US" sz="1400" dirty="0">
+                <a:solidFill>
+                  <a:schemeClr val="tx1">
+                    <a:lumMod val="65000"/>
+                    <a:lumOff val="35000"/>
+                  </a:schemeClr>
+                </a:solidFill>
+              </a:rPr>
+              <a:t>&gt; {</a:t>
+            </a:r>
+          </a:p>
+          <a:p>
+            <a:r>
+              <a:rPr lang="en-US" sz="1800" dirty="0">
+                <a:solidFill>
+                  <a:schemeClr val="accent1"/>
+                </a:solidFill>
+              </a:rPr>
+              <a:t>    private final static </a:t>
+            </a:r>
+            <a:r>
+              <a:rPr lang="en-US" sz="1800" dirty="0" err="1">
+                <a:solidFill>
+                  <a:schemeClr val="accent1"/>
+                </a:solidFill>
+              </a:rPr>
+              <a:t>IntWritable</a:t>
+            </a:r>
+            <a:r>
+              <a:rPr lang="en-US" sz="1800" dirty="0">
+                <a:solidFill>
+                  <a:schemeClr val="accent1"/>
+                </a:solidFill>
+              </a:rPr>
+              <a:t> one = new </a:t>
+            </a:r>
+            <a:r>
+              <a:rPr lang="en-US" sz="1800" dirty="0" err="1">
+                <a:solidFill>
+                  <a:schemeClr val="accent1"/>
+                </a:solidFill>
+              </a:rPr>
+              <a:t>IntWritable</a:t>
+            </a:r>
+            <a:r>
+              <a:rPr lang="en-US" sz="1800" dirty="0">
+                <a:solidFill>
+                  <a:schemeClr val="accent1"/>
+                </a:solidFill>
+              </a:rPr>
+              <a:t>(1);</a:t>
+            </a:r>
+          </a:p>
+          <a:p>
+            <a:r>
+              <a:rPr lang="en-US" sz="1800" dirty="0">
+                <a:solidFill>
+                  <a:schemeClr val="accent1"/>
+                </a:solidFill>
+              </a:rPr>
+              <a:t>    private Text word = new Text();</a:t>
+            </a:r>
+          </a:p>
+          <a:p>
+            <a:r>
+              <a:rPr lang="en-US" sz="1400" dirty="0">
+                <a:solidFill>
+                  <a:schemeClr val="tx1">
+                    <a:lumMod val="65000"/>
+                    <a:lumOff val="35000"/>
+                  </a:schemeClr>
+                </a:solidFill>
+              </a:rPr>
+              <a:t>  public void map(</a:t>
+            </a:r>
+            <a:r>
+              <a:rPr lang="en-US" sz="1400" dirty="0" err="1">
+                <a:solidFill>
+                  <a:schemeClr val="tx1">
+                    <a:lumMod val="65000"/>
+                    <a:lumOff val="35000"/>
+                  </a:schemeClr>
+                </a:solidFill>
+              </a:rPr>
+              <a:t>LongWritable</a:t>
+            </a:r>
+            <a:r>
+              <a:rPr lang="en-US" sz="1400" dirty="0">
+                <a:solidFill>
+                  <a:schemeClr val="tx1">
+                    <a:lumMod val="65000"/>
+                    <a:lumOff val="35000"/>
+                  </a:schemeClr>
+                </a:solidFill>
+              </a:rPr>
+              <a:t> key, Text value,</a:t>
+            </a:r>
+          </a:p>
+          <a:p>
+            <a:r>
+              <a:rPr lang="en-US" sz="1400" dirty="0">
+                <a:solidFill>
+                  <a:schemeClr val="tx1">
+                    <a:lumMod val="65000"/>
+                    <a:lumOff val="35000"/>
+                  </a:schemeClr>
+                </a:solidFill>
+              </a:rPr>
+              <a:t>				</a:t>
+            </a:r>
+            <a:r>
+              <a:rPr lang="en-US" sz="1400" dirty="0" err="1">
+                <a:solidFill>
+                  <a:schemeClr val="tx1">
+                    <a:lumMod val="65000"/>
+                    <a:lumOff val="35000"/>
+                  </a:schemeClr>
+                </a:solidFill>
+              </a:rPr>
+              <a:t>OutputCollector</a:t>
+            </a:r>
+            <a:r>
+              <a:rPr lang="en-US" sz="1400" dirty="0">
+                <a:solidFill>
+                  <a:schemeClr val="tx1">
+                    <a:lumMod val="65000"/>
+                    <a:lumOff val="35000"/>
+                  </a:schemeClr>
+                </a:solidFill>
+              </a:rPr>
+              <a:t>&lt;Text, </a:t>
+            </a:r>
+            <a:r>
+              <a:rPr lang="en-US" sz="1400" dirty="0" err="1">
+                <a:solidFill>
+                  <a:schemeClr val="tx1">
+                    <a:lumMod val="65000"/>
+                    <a:lumOff val="35000"/>
+                  </a:schemeClr>
+                </a:solidFill>
+              </a:rPr>
+              <a:t>IntWritable</a:t>
+            </a:r>
+            <a:r>
+              <a:rPr lang="en-US" sz="1400" dirty="0">
+                <a:solidFill>
+                  <a:schemeClr val="tx1">
+                    <a:lumMod val="65000"/>
+                    <a:lumOff val="35000"/>
+                  </a:schemeClr>
+                </a:solidFill>
+              </a:rPr>
+              <a:t>&gt; output,</a:t>
+            </a:r>
+          </a:p>
+          <a:p>
+            <a:r>
+              <a:rPr lang="en-US" sz="1400" dirty="0">
+                <a:solidFill>
+                  <a:schemeClr val="tx1">
+                    <a:lumMod val="65000"/>
+                    <a:lumOff val="35000"/>
+                  </a:schemeClr>
+                </a:solidFill>
+              </a:rPr>
+              <a:t>				Reporter reporter) throws </a:t>
+            </a:r>
+            <a:r>
+              <a:rPr lang="en-US" sz="1400" dirty="0" err="1">
+                <a:solidFill>
+                  <a:schemeClr val="tx1">
+                    <a:lumMod val="65000"/>
+                    <a:lumOff val="35000"/>
+                  </a:schemeClr>
+                </a:solidFill>
+              </a:rPr>
+              <a:t>IOException</a:t>
+            </a:r>
+            <a:r>
+              <a:rPr lang="en-US" sz="1400" dirty="0">
+                <a:solidFill>
+                  <a:schemeClr val="tx1">
+                    <a:lumMod val="65000"/>
+                    <a:lumOff val="35000"/>
+                  </a:schemeClr>
+                </a:solidFill>
+              </a:rPr>
+              <a:t> {</a:t>
+            </a:r>
+          </a:p>
+          <a:p>
+            <a:r>
+              <a:rPr lang="en-US" sz="1600" dirty="0">
+                <a:solidFill>
+                  <a:schemeClr val="accent3"/>
+                </a:solidFill>
+              </a:rPr>
+              <a:t>        // Split the given line (in value) into words and emit for each word the tuple </a:t>
+            </a:r>
+            <a:r>
+              <a:rPr lang="en-US" sz="1600" i="1" dirty="0">
+                <a:solidFill>
+                  <a:schemeClr val="accent3"/>
+                </a:solidFill>
+              </a:rPr>
+              <a:t>&lt;word, 1&gt;</a:t>
+            </a:r>
+          </a:p>
+          <a:p>
+            <a:r>
+              <a:rPr lang="en-US" sz="1800" dirty="0">
+                <a:solidFill>
+                  <a:srgbClr val="4F81BD"/>
+                </a:solidFill>
+              </a:rPr>
+              <a:t>      String line = </a:t>
+            </a:r>
+            <a:r>
+              <a:rPr lang="en-US" sz="1800" dirty="0" err="1">
+                <a:solidFill>
+                  <a:srgbClr val="4F81BD"/>
+                </a:solidFill>
+              </a:rPr>
+              <a:t>value.toString</a:t>
+            </a:r>
+            <a:r>
+              <a:rPr lang="en-US" sz="1800" dirty="0">
+                <a:solidFill>
+                  <a:srgbClr val="4F81BD"/>
+                </a:solidFill>
+              </a:rPr>
+              <a:t>();</a:t>
+            </a:r>
+          </a:p>
+          <a:p>
+            <a:r>
+              <a:rPr lang="en-US" sz="1800" dirty="0">
+                <a:solidFill>
+                  <a:srgbClr val="4F81BD"/>
+                </a:solidFill>
+              </a:rPr>
+              <a:t>      </a:t>
+            </a:r>
+            <a:r>
+              <a:rPr lang="en-US" sz="1800" dirty="0" err="1">
+                <a:solidFill>
+                  <a:srgbClr val="4F81BD"/>
+                </a:solidFill>
+              </a:rPr>
+              <a:t>StringTokenizer</a:t>
+            </a:r>
+            <a:r>
+              <a:rPr lang="en-US" sz="1800" dirty="0">
+                <a:solidFill>
+                  <a:srgbClr val="4F81BD"/>
+                </a:solidFill>
+              </a:rPr>
+              <a:t> </a:t>
+            </a:r>
+            <a:r>
+              <a:rPr lang="en-US" sz="1800" dirty="0" err="1">
+                <a:solidFill>
+                  <a:srgbClr val="4F81BD"/>
+                </a:solidFill>
+              </a:rPr>
+              <a:t>itr</a:t>
+            </a:r>
+            <a:r>
+              <a:rPr lang="en-US" sz="1800" dirty="0">
+                <a:solidFill>
+                  <a:srgbClr val="4F81BD"/>
+                </a:solidFill>
+              </a:rPr>
+              <a:t> = new </a:t>
+            </a:r>
+            <a:r>
+              <a:rPr lang="en-US" sz="1800" dirty="0" err="1">
+                <a:solidFill>
+                  <a:srgbClr val="4F81BD"/>
+                </a:solidFill>
+              </a:rPr>
+              <a:t>StringTokenizer</a:t>
+            </a:r>
+            <a:r>
+              <a:rPr lang="en-US" sz="1800" dirty="0">
+                <a:solidFill>
+                  <a:srgbClr val="4F81BD"/>
+                </a:solidFill>
+              </a:rPr>
+              <a:t>(line);</a:t>
+            </a:r>
+          </a:p>
+          <a:p>
+            <a:r>
+              <a:rPr lang="en-US" sz="1800" dirty="0">
+                <a:solidFill>
+                  <a:srgbClr val="4F81BD"/>
+                </a:solidFill>
+              </a:rPr>
+              <a:t>      while (</a:t>
+            </a:r>
+            <a:r>
+              <a:rPr lang="en-US" sz="1800" dirty="0" err="1">
+                <a:solidFill>
+                  <a:srgbClr val="4F81BD"/>
+                </a:solidFill>
+              </a:rPr>
+              <a:t>itr.hasMoreTokens</a:t>
+            </a:r>
+            <a:r>
+              <a:rPr lang="en-US" sz="1800" dirty="0">
+                <a:solidFill>
+                  <a:srgbClr val="4F81BD"/>
+                </a:solidFill>
+              </a:rPr>
+              <a:t>()) {</a:t>
+            </a:r>
+          </a:p>
+          <a:p>
+            <a:r>
+              <a:rPr lang="en-US" sz="1800" dirty="0">
+                <a:solidFill>
+                  <a:srgbClr val="4F81BD"/>
+                </a:solidFill>
+              </a:rPr>
+              <a:t>        </a:t>
+            </a:r>
+            <a:r>
+              <a:rPr lang="en-US" sz="1800" dirty="0" err="1">
+                <a:solidFill>
+                  <a:srgbClr val="4F81BD"/>
+                </a:solidFill>
+              </a:rPr>
+              <a:t>word.set</a:t>
+            </a:r>
+            <a:r>
+              <a:rPr lang="en-US" sz="1800" dirty="0">
+                <a:solidFill>
+                  <a:srgbClr val="4F81BD"/>
+                </a:solidFill>
+              </a:rPr>
+              <a:t>(</a:t>
+            </a:r>
+            <a:r>
+              <a:rPr lang="en-US" sz="1800" dirty="0" err="1">
+                <a:solidFill>
+                  <a:srgbClr val="4F81BD"/>
+                </a:solidFill>
+              </a:rPr>
+              <a:t>itr.nextToken</a:t>
+            </a:r>
+            <a:r>
+              <a:rPr lang="en-US" sz="1800" dirty="0">
+                <a:solidFill>
+                  <a:srgbClr val="4F81BD"/>
+                </a:solidFill>
+              </a:rPr>
+              <a:t>());</a:t>
+            </a:r>
+          </a:p>
+          <a:p>
+            <a:r>
+              <a:rPr lang="en-US" sz="1800" dirty="0">
+                <a:solidFill>
+                  <a:srgbClr val="4F81BD"/>
+                </a:solidFill>
+              </a:rPr>
+              <a:t>        </a:t>
+            </a:r>
+            <a:r>
+              <a:rPr lang="en-US" sz="1800" dirty="0" err="1">
+                <a:solidFill>
+                  <a:srgbClr val="4F81BD"/>
+                </a:solidFill>
+              </a:rPr>
+              <a:t>output.collect</a:t>
+            </a:r>
+            <a:r>
+              <a:rPr lang="en-US" sz="1800" dirty="0">
+                <a:solidFill>
+                  <a:srgbClr val="4F81BD"/>
+                </a:solidFill>
+              </a:rPr>
+              <a:t>(word, one);</a:t>
+            </a:r>
+          </a:p>
+          <a:p>
+            <a:r>
+              <a:rPr lang="en-US" sz="1800" dirty="0">
+                <a:solidFill>
+                  <a:srgbClr val="4F81BD"/>
+                </a:solidFill>
+              </a:rPr>
+              <a:t>      }</a:t>
+            </a:r>
+          </a:p>
+          <a:p>
+            <a:r>
+              <a:rPr lang="en-US" sz="1400" dirty="0">
+                <a:solidFill>
+                  <a:schemeClr val="tx1">
+                    <a:lumMod val="65000"/>
+                    <a:lumOff val="35000"/>
+                  </a:schemeClr>
+                </a:solidFill>
+              </a:rPr>
+              <a:t>    }</a:t>
+            </a:r>
+          </a:p>
+          <a:p>
+            <a:r>
+              <a:rPr lang="en-US" sz="1400" dirty="0">
+                <a:solidFill>
+                  <a:schemeClr val="tx1">
+                    <a:lumMod val="65000"/>
+                    <a:lumOff val="35000"/>
+                  </a:schemeClr>
+                </a:solidFill>
+              </a:rPr>
+              <a:t>  }</a:t>
+            </a:r>
           </a:p>
         </p:txBody>
       </p:sp>
@@ -8359,10 +8338,9 @@
           <a:lstStyle/>
           <a:p>
             <a:r>
-              <a:rPr lang="en-US" smtClean="0"/>
+              <a:rPr lang="en-US"/>
               <a:t>Feb 21, 2014</a:t>
             </a:r>
-            <a:endParaRPr lang="en-US"/>
           </a:p>
         </p:txBody>
       </p:sp>
@@ -8382,7 +8360,7 @@
           <a:lstStyle/>
           <a:p>
             <a:r>
-              <a:rPr lang="de-DE" smtClean="0"/>
+              <a:rPr lang="de-DE"/>
               <a:t>CS512 | Spring 2014</a:t>
             </a:r>
             <a:endParaRPr lang="en-US"/>
@@ -8406,7 +8384,7 @@
           </a:bodyPr>
           <a:lstStyle/>
           <a:p>
-            <a:endParaRPr lang="en-US" dirty="0" smtClean="0"/>
+            <a:endParaRPr lang="en-US" dirty="0"/>
           </a:p>
           <a:p>
             <a:endParaRPr lang="en-US" dirty="0"/>
@@ -8438,20 +8416,13 @@
     </p:spTree>
     <p:extLst>
       <p:ext uri="{BB962C8B-B14F-4D97-AF65-F5344CB8AC3E}">
-        <p14:creationId xmlns:p14="http://schemas.microsoft.com/office/powerpoint/2010/main" val="1900027256"/>
+        <p14:creationId xmlns:p14="http://schemas.microsoft.com/office/powerpoint/2010/main" val="1512423335"/>
       </p:ext>
     </p:extLst>
   </p:cSld>
   <p:clrMapOvr>
     <a:masterClrMapping/>
   </p:clrMapOvr>
-  <p:timing>
-    <p:tnLst>
-      <p:par>
-        <p:cTn xmlns:p14="http://schemas.microsoft.com/office/powerpoint/2010/main" id="1" dur="indefinite" restart="never" nodeType="tmRoot"/>
-      </p:par>
-    </p:tnLst>
-  </p:timing>
 </p:sld>
 </file>
 
@@ -8495,7 +8466,7 @@
           <a:lstStyle/>
           <a:p>
             <a:r>
-              <a:rPr lang="en-US" sz="1400" b="1" i="1" dirty="0" smtClean="0">
+              <a:rPr lang="en-US" sz="1400" b="1" i="1" dirty="0">
                 <a:solidFill>
                   <a:schemeClr val="tx1">
                     <a:lumMod val="65000"/>
@@ -8503,17 +8474,30 @@
                   </a:schemeClr>
                 </a:solidFill>
               </a:rPr>
-              <a:t>Mapper</a:t>
-            </a:r>
-          </a:p>
-          <a:p>
-            <a:r>
-              <a:rPr lang="en-US" sz="1400" dirty="0" smtClean="0">
-                <a:solidFill>
-                  <a:schemeClr val="tx1">
-                    <a:lumMod val="65000"/>
-                    <a:lumOff val="35000"/>
-                  </a:schemeClr>
+              <a:t>Reducer</a:t>
+            </a:r>
+          </a:p>
+          <a:p>
+            <a:r>
+              <a:rPr lang="en-US" sz="1400" dirty="0">
+                <a:solidFill>
+                  <a:srgbClr val="595959"/>
+                </a:solidFill>
+              </a:rPr>
+              <a:t> public static class </a:t>
+            </a:r>
+            <a:r>
+              <a:rPr lang="en-US" sz="1800" dirty="0" err="1">
+                <a:solidFill>
+                  <a:schemeClr val="accent1"/>
+                </a:solidFill>
+              </a:rPr>
+              <a:t>MyReducer</a:t>
+            </a:r>
+            <a:r>
+              <a:rPr lang="en-US" sz="1400" dirty="0">
+                <a:solidFill>
+                  <a:schemeClr val="accent1"/>
                 </a:solidFill>
               </a:rPr>
               <a:t> </a:t>
@@ -8521,826 +8505,10 @@
             <a:r>
               <a:rPr lang="en-US" sz="1400" dirty="0">
                 <a:solidFill>
-                  <a:schemeClr val="tx1">
-                    <a:lumMod val="65000"/>
-                    <a:lumOff val="35000"/>
-                  </a:schemeClr>
+                  <a:srgbClr val="595959"/>
                 </a:solidFill>
               </a:rPr>
-              <a:t>public static class </a:t>
-            </a:r>
-            <a:r>
-              <a:rPr lang="en-US" sz="1800" dirty="0" err="1" smtClean="0">
-                <a:solidFill>
-                  <a:schemeClr val="accent1"/>
-                </a:solidFill>
-              </a:rPr>
-              <a:t>MyMapper</a:t>
-            </a:r>
-            <a:r>
-              <a:rPr lang="en-US" sz="1400" dirty="0" smtClean="0">
-                <a:solidFill>
-                  <a:schemeClr val="tx1">
-                    <a:lumMod val="65000"/>
-                    <a:lumOff val="35000"/>
-                  </a:schemeClr>
-                </a:solidFill>
-              </a:rPr>
-              <a:t> implements </a:t>
-            </a:r>
-            <a:r>
-              <a:rPr lang="en-US" sz="1400" i="1" dirty="0" smtClean="0">
-                <a:solidFill>
-                  <a:schemeClr val="tx1">
-                    <a:lumMod val="65000"/>
-                    <a:lumOff val="35000"/>
-                  </a:schemeClr>
-                </a:solidFill>
-              </a:rPr>
-              <a:t>Mapper</a:t>
-            </a:r>
-            <a:r>
-              <a:rPr lang="en-US" sz="1400" dirty="0" smtClean="0">
-                <a:solidFill>
-                  <a:schemeClr val="tx1">
-                    <a:lumMod val="65000"/>
-                    <a:lumOff val="35000"/>
-                  </a:schemeClr>
-                </a:solidFill>
-              </a:rPr>
-              <a:t>&lt;</a:t>
-            </a:r>
-            <a:r>
-              <a:rPr lang="en-US" sz="1400" dirty="0" err="1" smtClean="0">
-                <a:solidFill>
-                  <a:schemeClr val="tx1">
-                    <a:lumMod val="65000"/>
-                    <a:lumOff val="35000"/>
-                  </a:schemeClr>
-                </a:solidFill>
-              </a:rPr>
-              <a:t>LongWritable</a:t>
-            </a:r>
-            <a:r>
-              <a:rPr lang="en-US" sz="1400" dirty="0" smtClean="0">
-                <a:solidFill>
-                  <a:schemeClr val="tx1">
-                    <a:lumMod val="65000"/>
-                    <a:lumOff val="35000"/>
-                  </a:schemeClr>
-                </a:solidFill>
-              </a:rPr>
-              <a:t>, Text, Text, </a:t>
-            </a:r>
-            <a:r>
-              <a:rPr lang="en-US" sz="1400" dirty="0" err="1" smtClean="0">
-                <a:solidFill>
-                  <a:schemeClr val="tx1">
-                    <a:lumMod val="65000"/>
-                    <a:lumOff val="35000"/>
-                  </a:schemeClr>
-                </a:solidFill>
-              </a:rPr>
-              <a:t>IntWritable</a:t>
-            </a:r>
-            <a:r>
-              <a:rPr lang="en-US" sz="1400" dirty="0" smtClean="0">
-                <a:solidFill>
-                  <a:schemeClr val="tx1">
-                    <a:lumMod val="65000"/>
-                    <a:lumOff val="35000"/>
-                  </a:schemeClr>
-                </a:solidFill>
-              </a:rPr>
-              <a:t>&gt; {</a:t>
-            </a:r>
-          </a:p>
-          <a:p>
-            <a:r>
-              <a:rPr lang="en-US" sz="1800" dirty="0">
-                <a:solidFill>
-                  <a:schemeClr val="accent1"/>
-                </a:solidFill>
-              </a:rPr>
-              <a:t> </a:t>
-            </a:r>
-            <a:r>
-              <a:rPr lang="en-US" sz="1800" dirty="0" smtClean="0">
-                <a:solidFill>
-                  <a:schemeClr val="accent1"/>
-                </a:solidFill>
-              </a:rPr>
-              <a:t>   private </a:t>
-            </a:r>
-            <a:r>
-              <a:rPr lang="en-US" sz="1800" dirty="0">
-                <a:solidFill>
-                  <a:schemeClr val="accent1"/>
-                </a:solidFill>
-              </a:rPr>
-              <a:t>final static </a:t>
-            </a:r>
-            <a:r>
-              <a:rPr lang="en-US" sz="1800" dirty="0" err="1">
-                <a:solidFill>
-                  <a:schemeClr val="accent1"/>
-                </a:solidFill>
-              </a:rPr>
-              <a:t>IntWritable</a:t>
-            </a:r>
-            <a:r>
-              <a:rPr lang="en-US" sz="1800" dirty="0">
-                <a:solidFill>
-                  <a:schemeClr val="accent1"/>
-                </a:solidFill>
-              </a:rPr>
-              <a:t> one = new </a:t>
-            </a:r>
-            <a:r>
-              <a:rPr lang="en-US" sz="1800" dirty="0" err="1">
-                <a:solidFill>
-                  <a:schemeClr val="accent1"/>
-                </a:solidFill>
-              </a:rPr>
-              <a:t>IntWritable</a:t>
-            </a:r>
-            <a:r>
-              <a:rPr lang="en-US" sz="1800" dirty="0">
-                <a:solidFill>
-                  <a:schemeClr val="accent1"/>
-                </a:solidFill>
-              </a:rPr>
-              <a:t>(1);</a:t>
-            </a:r>
-          </a:p>
-          <a:p>
-            <a:r>
-              <a:rPr lang="en-US" sz="1800" dirty="0">
-                <a:solidFill>
-                  <a:schemeClr val="accent1"/>
-                </a:solidFill>
-              </a:rPr>
-              <a:t>    private Text word = new Text();</a:t>
-            </a:r>
-          </a:p>
-          <a:p>
-            <a:r>
-              <a:rPr lang="en-US" sz="1400" dirty="0" smtClean="0">
-                <a:solidFill>
-                  <a:schemeClr val="tx1">
-                    <a:lumMod val="65000"/>
-                    <a:lumOff val="35000"/>
-                  </a:schemeClr>
-                </a:solidFill>
-              </a:rPr>
-              <a:t>  public </a:t>
-            </a:r>
-            <a:r>
-              <a:rPr lang="en-US" sz="1400" dirty="0">
-                <a:solidFill>
-                  <a:schemeClr val="tx1">
-                    <a:lumMod val="65000"/>
-                    <a:lumOff val="35000"/>
-                  </a:schemeClr>
-                </a:solidFill>
-              </a:rPr>
-              <a:t>void map(</a:t>
-            </a:r>
-            <a:r>
-              <a:rPr lang="en-US" sz="1400" dirty="0" err="1">
-                <a:solidFill>
-                  <a:schemeClr val="tx1">
-                    <a:lumMod val="65000"/>
-                    <a:lumOff val="35000"/>
-                  </a:schemeClr>
-                </a:solidFill>
-              </a:rPr>
-              <a:t>LongWritable</a:t>
-            </a:r>
-            <a:r>
-              <a:rPr lang="en-US" sz="1400" dirty="0">
-                <a:solidFill>
-                  <a:schemeClr val="tx1">
-                    <a:lumMod val="65000"/>
-                    <a:lumOff val="35000"/>
-                  </a:schemeClr>
-                </a:solidFill>
-              </a:rPr>
-              <a:t> key, Text value</a:t>
-            </a:r>
-            <a:r>
-              <a:rPr lang="en-US" sz="1400" dirty="0" smtClean="0">
-                <a:solidFill>
-                  <a:schemeClr val="tx1">
-                    <a:lumMod val="65000"/>
-                    <a:lumOff val="35000"/>
-                  </a:schemeClr>
-                </a:solidFill>
-              </a:rPr>
-              <a:t>,</a:t>
-            </a:r>
-          </a:p>
-          <a:p>
-            <a:r>
-              <a:rPr lang="en-US" sz="1400" dirty="0">
-                <a:solidFill>
-                  <a:schemeClr val="tx1">
-                    <a:lumMod val="65000"/>
-                    <a:lumOff val="35000"/>
-                  </a:schemeClr>
-                </a:solidFill>
-              </a:rPr>
-              <a:t>	</a:t>
-            </a:r>
-            <a:r>
-              <a:rPr lang="en-US" sz="1400" dirty="0" smtClean="0">
-                <a:solidFill>
-                  <a:schemeClr val="tx1">
-                    <a:lumMod val="65000"/>
-                    <a:lumOff val="35000"/>
-                  </a:schemeClr>
-                </a:solidFill>
-              </a:rPr>
-              <a:t>			</a:t>
-            </a:r>
-            <a:r>
-              <a:rPr lang="en-US" sz="1400" dirty="0" err="1" smtClean="0">
-                <a:solidFill>
-                  <a:schemeClr val="tx1">
-                    <a:lumMod val="65000"/>
-                    <a:lumOff val="35000"/>
-                  </a:schemeClr>
-                </a:solidFill>
-              </a:rPr>
-              <a:t>OutputCollector</a:t>
-            </a:r>
-            <a:r>
-              <a:rPr lang="en-US" sz="1400" dirty="0">
-                <a:solidFill>
-                  <a:schemeClr val="tx1">
-                    <a:lumMod val="65000"/>
-                    <a:lumOff val="35000"/>
-                  </a:schemeClr>
-                </a:solidFill>
-              </a:rPr>
-              <a:t>&lt;Text, </a:t>
-            </a:r>
-            <a:r>
-              <a:rPr lang="en-US" sz="1400" dirty="0" err="1">
-                <a:solidFill>
-                  <a:schemeClr val="tx1">
-                    <a:lumMod val="65000"/>
-                    <a:lumOff val="35000"/>
-                  </a:schemeClr>
-                </a:solidFill>
-              </a:rPr>
-              <a:t>IntWritable</a:t>
-            </a:r>
-            <a:r>
-              <a:rPr lang="en-US" sz="1400" dirty="0">
-                <a:solidFill>
-                  <a:schemeClr val="tx1">
-                    <a:lumMod val="65000"/>
-                    <a:lumOff val="35000"/>
-                  </a:schemeClr>
-                </a:solidFill>
-              </a:rPr>
-              <a:t>&gt; output</a:t>
-            </a:r>
-            <a:r>
-              <a:rPr lang="en-US" sz="1400" dirty="0" smtClean="0">
-                <a:solidFill>
-                  <a:schemeClr val="tx1">
-                    <a:lumMod val="65000"/>
-                    <a:lumOff val="35000"/>
-                  </a:schemeClr>
-                </a:solidFill>
-              </a:rPr>
-              <a:t>,</a:t>
-            </a:r>
-          </a:p>
-          <a:p>
-            <a:r>
-              <a:rPr lang="en-US" sz="1400" dirty="0">
-                <a:solidFill>
-                  <a:schemeClr val="tx1">
-                    <a:lumMod val="65000"/>
-                    <a:lumOff val="35000"/>
-                  </a:schemeClr>
-                </a:solidFill>
-              </a:rPr>
-              <a:t>	</a:t>
-            </a:r>
-            <a:r>
-              <a:rPr lang="en-US" sz="1400" dirty="0" smtClean="0">
-                <a:solidFill>
-                  <a:schemeClr val="tx1">
-                    <a:lumMod val="65000"/>
-                    <a:lumOff val="35000"/>
-                  </a:schemeClr>
-                </a:solidFill>
-              </a:rPr>
-              <a:t>			Reporter </a:t>
-            </a:r>
-            <a:r>
-              <a:rPr lang="en-US" sz="1400" dirty="0">
-                <a:solidFill>
-                  <a:schemeClr val="tx1">
-                    <a:lumMod val="65000"/>
-                    <a:lumOff val="35000"/>
-                  </a:schemeClr>
-                </a:solidFill>
-              </a:rPr>
-              <a:t>reporter) throws </a:t>
-            </a:r>
-            <a:r>
-              <a:rPr lang="en-US" sz="1400" dirty="0" err="1">
-                <a:solidFill>
-                  <a:schemeClr val="tx1">
-                    <a:lumMod val="65000"/>
-                    <a:lumOff val="35000"/>
-                  </a:schemeClr>
-                </a:solidFill>
-              </a:rPr>
-              <a:t>IOException</a:t>
-            </a:r>
-            <a:r>
-              <a:rPr lang="en-US" sz="1400" dirty="0">
-                <a:solidFill>
-                  <a:schemeClr val="tx1">
-                    <a:lumMod val="65000"/>
-                    <a:lumOff val="35000"/>
-                  </a:schemeClr>
-                </a:solidFill>
-              </a:rPr>
-              <a:t> </a:t>
-            </a:r>
-            <a:r>
-              <a:rPr lang="en-US" sz="1400" dirty="0" smtClean="0">
-                <a:solidFill>
-                  <a:schemeClr val="tx1">
-                    <a:lumMod val="65000"/>
-                    <a:lumOff val="35000"/>
-                  </a:schemeClr>
-                </a:solidFill>
-              </a:rPr>
-              <a:t>{</a:t>
-            </a:r>
-          </a:p>
-          <a:p>
-            <a:r>
-              <a:rPr lang="en-US" sz="1600" dirty="0" smtClean="0">
-                <a:solidFill>
-                  <a:schemeClr val="accent3"/>
-                </a:solidFill>
-              </a:rPr>
-              <a:t>        // Split the given line (in value) into words and emit for each word the tuple </a:t>
-            </a:r>
-            <a:r>
-              <a:rPr lang="en-US" sz="1600" i="1" dirty="0" smtClean="0">
-                <a:solidFill>
-                  <a:schemeClr val="accent3"/>
-                </a:solidFill>
-              </a:rPr>
-              <a:t>&lt;word, 1&gt;</a:t>
-            </a:r>
-            <a:endParaRPr lang="en-US" sz="1600" i="1" dirty="0">
-              <a:solidFill>
-                <a:schemeClr val="accent3"/>
-              </a:solidFill>
-            </a:endParaRPr>
-          </a:p>
-          <a:p>
-            <a:r>
-              <a:rPr lang="en-US" sz="1800" dirty="0">
-                <a:solidFill>
-                  <a:srgbClr val="4F81BD"/>
-                </a:solidFill>
-              </a:rPr>
-              <a:t>      String line = </a:t>
-            </a:r>
-            <a:r>
-              <a:rPr lang="en-US" sz="1800" dirty="0" err="1">
-                <a:solidFill>
-                  <a:srgbClr val="4F81BD"/>
-                </a:solidFill>
-              </a:rPr>
-              <a:t>value.toString</a:t>
-            </a:r>
-            <a:r>
-              <a:rPr lang="en-US" sz="1800" dirty="0">
-                <a:solidFill>
-                  <a:srgbClr val="4F81BD"/>
-                </a:solidFill>
-              </a:rPr>
-              <a:t>();</a:t>
-            </a:r>
-          </a:p>
-          <a:p>
-            <a:r>
-              <a:rPr lang="en-US" sz="1800" dirty="0">
-                <a:solidFill>
-                  <a:srgbClr val="4F81BD"/>
-                </a:solidFill>
-              </a:rPr>
-              <a:t>      </a:t>
-            </a:r>
-            <a:r>
-              <a:rPr lang="en-US" sz="1800" dirty="0" err="1">
-                <a:solidFill>
-                  <a:srgbClr val="4F81BD"/>
-                </a:solidFill>
-              </a:rPr>
-              <a:t>StringTokenizer</a:t>
-            </a:r>
-            <a:r>
-              <a:rPr lang="en-US" sz="1800" dirty="0">
-                <a:solidFill>
-                  <a:srgbClr val="4F81BD"/>
-                </a:solidFill>
-              </a:rPr>
-              <a:t> </a:t>
-            </a:r>
-            <a:r>
-              <a:rPr lang="en-US" sz="1800" dirty="0" err="1">
-                <a:solidFill>
-                  <a:srgbClr val="4F81BD"/>
-                </a:solidFill>
-              </a:rPr>
-              <a:t>itr</a:t>
-            </a:r>
-            <a:r>
-              <a:rPr lang="en-US" sz="1800" dirty="0">
-                <a:solidFill>
-                  <a:srgbClr val="4F81BD"/>
-                </a:solidFill>
-              </a:rPr>
-              <a:t> = new </a:t>
-            </a:r>
-            <a:r>
-              <a:rPr lang="en-US" sz="1800" dirty="0" err="1">
-                <a:solidFill>
-                  <a:srgbClr val="4F81BD"/>
-                </a:solidFill>
-              </a:rPr>
-              <a:t>StringTokenizer</a:t>
-            </a:r>
-            <a:r>
-              <a:rPr lang="en-US" sz="1800" dirty="0">
-                <a:solidFill>
-                  <a:srgbClr val="4F81BD"/>
-                </a:solidFill>
-              </a:rPr>
-              <a:t>(line);</a:t>
-            </a:r>
-          </a:p>
-          <a:p>
-            <a:r>
-              <a:rPr lang="en-US" sz="1800" dirty="0">
-                <a:solidFill>
-                  <a:srgbClr val="4F81BD"/>
-                </a:solidFill>
-              </a:rPr>
-              <a:t>      while (</a:t>
-            </a:r>
-            <a:r>
-              <a:rPr lang="en-US" sz="1800" dirty="0" err="1">
-                <a:solidFill>
-                  <a:srgbClr val="4F81BD"/>
-                </a:solidFill>
-              </a:rPr>
-              <a:t>itr.hasMoreTokens</a:t>
-            </a:r>
-            <a:r>
-              <a:rPr lang="en-US" sz="1800" dirty="0">
-                <a:solidFill>
-                  <a:srgbClr val="4F81BD"/>
-                </a:solidFill>
-              </a:rPr>
-              <a:t>()) {</a:t>
-            </a:r>
-          </a:p>
-          <a:p>
-            <a:r>
-              <a:rPr lang="en-US" sz="1800" dirty="0">
-                <a:solidFill>
-                  <a:srgbClr val="4F81BD"/>
-                </a:solidFill>
-              </a:rPr>
-              <a:t>        </a:t>
-            </a:r>
-            <a:r>
-              <a:rPr lang="en-US" sz="1800" dirty="0" err="1">
-                <a:solidFill>
-                  <a:srgbClr val="4F81BD"/>
-                </a:solidFill>
-              </a:rPr>
-              <a:t>word.set</a:t>
-            </a:r>
-            <a:r>
-              <a:rPr lang="en-US" sz="1800" dirty="0">
-                <a:solidFill>
-                  <a:srgbClr val="4F81BD"/>
-                </a:solidFill>
-              </a:rPr>
-              <a:t>(</a:t>
-            </a:r>
-            <a:r>
-              <a:rPr lang="en-US" sz="1800" dirty="0" err="1">
-                <a:solidFill>
-                  <a:srgbClr val="4F81BD"/>
-                </a:solidFill>
-              </a:rPr>
-              <a:t>itr.nextToken</a:t>
-            </a:r>
-            <a:r>
-              <a:rPr lang="en-US" sz="1800" dirty="0">
-                <a:solidFill>
-                  <a:srgbClr val="4F81BD"/>
-                </a:solidFill>
-              </a:rPr>
-              <a:t>());</a:t>
-            </a:r>
-          </a:p>
-          <a:p>
-            <a:r>
-              <a:rPr lang="en-US" sz="1800" dirty="0">
-                <a:solidFill>
-                  <a:srgbClr val="4F81BD"/>
-                </a:solidFill>
-              </a:rPr>
-              <a:t>        </a:t>
-            </a:r>
-            <a:r>
-              <a:rPr lang="en-US" sz="1800" dirty="0" err="1">
-                <a:solidFill>
-                  <a:srgbClr val="4F81BD"/>
-                </a:solidFill>
-              </a:rPr>
-              <a:t>output.collect</a:t>
-            </a:r>
-            <a:r>
-              <a:rPr lang="en-US" sz="1800" dirty="0">
-                <a:solidFill>
-                  <a:srgbClr val="4F81BD"/>
-                </a:solidFill>
-              </a:rPr>
-              <a:t>(word, one);</a:t>
-            </a:r>
-          </a:p>
-          <a:p>
-            <a:r>
-              <a:rPr lang="en-US" sz="1800" dirty="0">
-                <a:solidFill>
-                  <a:srgbClr val="4F81BD"/>
-                </a:solidFill>
-              </a:rPr>
-              <a:t>      }</a:t>
-            </a:r>
-          </a:p>
-          <a:p>
-            <a:r>
-              <a:rPr lang="en-US" sz="1400" dirty="0">
-                <a:solidFill>
-                  <a:schemeClr val="tx1">
-                    <a:lumMod val="65000"/>
-                    <a:lumOff val="35000"/>
-                  </a:schemeClr>
-                </a:solidFill>
-              </a:rPr>
-              <a:t>    }</a:t>
-            </a:r>
-          </a:p>
-          <a:p>
-            <a:r>
-              <a:rPr lang="en-US" sz="1400" dirty="0">
-                <a:solidFill>
-                  <a:schemeClr val="tx1">
-                    <a:lumMod val="65000"/>
-                    <a:lumOff val="35000"/>
-                  </a:schemeClr>
-                </a:solidFill>
-              </a:rPr>
-              <a:t>  }</a:t>
-            </a:r>
-            <a:endParaRPr lang="en-US" sz="1400" dirty="0">
-              <a:solidFill>
-                <a:schemeClr val="tx1">
-                  <a:lumMod val="65000"/>
-                  <a:lumOff val="35000"/>
-                </a:schemeClr>
-              </a:solidFill>
-            </a:endParaRPr>
-          </a:p>
-        </p:txBody>
-      </p:sp>
-      <p:sp>
-        <p:nvSpPr>
-          <p:cNvPr id="4" name="Date Placeholder 3"/>
-          <p:cNvSpPr>
-            <a:spLocks noGrp="1"/>
-          </p:cNvSpPr>
-          <p:nvPr>
-            <p:ph type="dt" sz="half" idx="10"/>
-          </p:nvPr>
-        </p:nvSpPr>
-        <p:spPr/>
-        <p:txBody>
-          <a:bodyPr/>
-          <a:lstStyle/>
-          <a:p>
-            <a:r>
-              <a:rPr lang="en-US" smtClean="0"/>
-              <a:t>Feb 21, 2014</a:t>
-            </a:r>
-            <a:endParaRPr lang="en-US"/>
-          </a:p>
-        </p:txBody>
-      </p:sp>
-      <p:sp>
-        <p:nvSpPr>
-          <p:cNvPr id="5" name="Footer Placeholder 4"/>
-          <p:cNvSpPr>
-            <a:spLocks noGrp="1"/>
-          </p:cNvSpPr>
-          <p:nvPr>
-            <p:ph type="ftr" sz="quarter" idx="11"/>
-          </p:nvPr>
-        </p:nvSpPr>
-        <p:spPr/>
-        <p:txBody>
-          <a:bodyPr/>
-          <a:lstStyle/>
-          <a:p>
-            <a:r>
-              <a:rPr lang="de-DE" smtClean="0"/>
-              <a:t>CS512 | Spring 2014</a:t>
-            </a:r>
-            <a:endParaRPr lang="en-US"/>
-          </a:p>
-        </p:txBody>
-      </p:sp>
-      <p:sp>
-        <p:nvSpPr>
-          <p:cNvPr id="6" name="Content Placeholder 5"/>
-          <p:cNvSpPr>
-            <a:spLocks noGrp="1"/>
-          </p:cNvSpPr>
-          <p:nvPr>
-            <p:ph idx="13"/>
-          </p:nvPr>
-        </p:nvSpPr>
-        <p:spPr/>
-        <p:txBody>
-          <a:bodyPr>
-            <a:normAutofit/>
-          </a:bodyPr>
-          <a:lstStyle/>
-          <a:p>
-            <a:endParaRPr lang="en-US" dirty="0" smtClean="0"/>
-          </a:p>
-          <a:p>
-            <a:endParaRPr lang="en-US" dirty="0"/>
-          </a:p>
-          <a:p>
-            <a:r>
-              <a:rPr lang="en-US" sz="1400" dirty="0" smtClean="0"/>
-              <a:t>https</a:t>
-            </a:r>
-            <a:r>
-              <a:rPr lang="en-US" sz="1400" dirty="0"/>
-              <a:t>://</a:t>
-            </a:r>
-            <a:r>
-              <a:rPr lang="en-US" sz="1400" dirty="0" err="1"/>
-              <a:t>developer.yahoo.com</a:t>
-            </a:r>
-            <a:r>
-              <a:rPr lang="en-US" sz="1400" dirty="0"/>
-              <a:t>/</a:t>
-            </a:r>
-            <a:r>
-              <a:rPr lang="en-US" sz="1400" dirty="0" err="1"/>
-              <a:t>hadoop</a:t>
-            </a:r>
-            <a:r>
-              <a:rPr lang="en-US" sz="1400" dirty="0"/>
-              <a:t>/tutorial/module4.html</a:t>
-            </a:r>
-          </a:p>
-        </p:txBody>
-      </p:sp>
-    </p:spTree>
-    <p:extLst>
-      <p:ext uri="{BB962C8B-B14F-4D97-AF65-F5344CB8AC3E}">
-        <p14:creationId xmlns:p14="http://schemas.microsoft.com/office/powerpoint/2010/main" val="1512423335"/>
-      </p:ext>
-    </p:extLst>
-  </p:cSld>
-  <p:clrMapOvr>
-    <a:masterClrMapping/>
-  </p:clrMapOvr>
-  <p:timing>
-    <p:tnLst>
-      <p:par>
-        <p:cTn xmlns:p14="http://schemas.microsoft.com/office/powerpoint/2010/main" id="1" dur="indefinite" restart="never" nodeType="tmRoot"/>
-      </p:par>
-    </p:tnLst>
-  </p:timing>
-</p:sld>
-</file>
-
-<file path=ppt/slides/slide32.xml><?xml version="1.0" encoding="utf-8"?>
-<p:sld xmlns:a="http://schemas.openxmlformats.org/drawingml/2006/main" xmlns:r="http://schemas.openxmlformats.org/officeDocument/2006/relationships" xmlns:p="http://schemas.openxmlformats.org/presentationml/2006/main">
-  <p:cSld>
-    <p:spTree>
-      <p:nvGrpSpPr>
-        <p:cNvPr id="1" name=""/>
-        <p:cNvGrpSpPr/>
-        <p:nvPr/>
-      </p:nvGrpSpPr>
-      <p:grpSpPr>
-        <a:xfrm>
-          <a:off x="0" y="0"/>
-          <a:ext cx="0" cy="0"/>
-          <a:chOff x="0" y="0"/>
-          <a:chExt cx="0" cy="0"/>
-        </a:xfrm>
-      </p:grpSpPr>
-      <p:sp>
-        <p:nvSpPr>
-          <p:cNvPr id="3" name="Content Placeholder 2"/>
-          <p:cNvSpPr>
-            <a:spLocks noGrp="1"/>
-          </p:cNvSpPr>
-          <p:nvPr>
-            <p:ph idx="1"/>
-          </p:nvPr>
-        </p:nvSpPr>
-        <p:spPr>
-          <a:xfrm>
-            <a:off x="457200" y="368672"/>
-            <a:ext cx="8229600" cy="4886119"/>
-          </a:xfrm>
-        </p:spPr>
-        <p:txBody>
-          <a:bodyPr>
-            <a:noAutofit/>
-          </a:bodyPr>
-          <a:lstStyle/>
-          <a:p>
-            <a:r>
-              <a:rPr lang="en-US" sz="1400" b="1" i="1" dirty="0" smtClean="0">
-                <a:solidFill>
-                  <a:schemeClr val="tx1">
-                    <a:lumMod val="65000"/>
-                    <a:lumOff val="35000"/>
-                  </a:schemeClr>
-                </a:solidFill>
-              </a:rPr>
-              <a:t>Reducer</a:t>
-            </a:r>
-          </a:p>
-          <a:p>
-            <a:r>
-              <a:rPr lang="en-US" sz="1400" dirty="0">
-                <a:solidFill>
-                  <a:srgbClr val="595959"/>
-                </a:solidFill>
-              </a:rPr>
-              <a:t> public static class </a:t>
-            </a:r>
-            <a:r>
-              <a:rPr lang="en-US" sz="1800" dirty="0" err="1" smtClean="0">
-                <a:solidFill>
-                  <a:schemeClr val="accent1"/>
-                </a:solidFill>
-              </a:rPr>
-              <a:t>MyReducer</a:t>
-            </a:r>
-            <a:r>
-              <a:rPr lang="en-US" sz="1400" dirty="0" smtClean="0">
-                <a:solidFill>
-                  <a:schemeClr val="accent1"/>
-                </a:solidFill>
-              </a:rPr>
-              <a:t> </a:t>
-            </a:r>
-            <a:r>
-              <a:rPr lang="en-US" sz="1400" dirty="0" smtClean="0">
-                <a:solidFill>
-                  <a:srgbClr val="595959"/>
-                </a:solidFill>
-              </a:rPr>
-              <a:t>implements </a:t>
-            </a:r>
-            <a:r>
-              <a:rPr lang="en-US" sz="1400" dirty="0">
-                <a:solidFill>
-                  <a:srgbClr val="595959"/>
-                </a:solidFill>
-              </a:rPr>
-              <a:t>Reducer&lt;Text, </a:t>
+              <a:t>implements Reducer&lt;Text, </a:t>
             </a:r>
             <a:r>
               <a:rPr lang="en-US" sz="1400" dirty="0" err="1">
@@ -9405,36 +8573,20 @@
                   <a:srgbClr val="595959"/>
                 </a:solidFill>
               </a:rPr>
-              <a:t>&gt; values</a:t>
-            </a:r>
-            <a:r>
-              <a:rPr lang="en-US" sz="1400" dirty="0" smtClean="0">
+              <a:t>&gt; values,</a:t>
+            </a:r>
+          </a:p>
+          <a:p>
+            <a:r>
+              <a:rPr lang="en-US" sz="1400" dirty="0">
                 <a:solidFill>
                   <a:srgbClr val="595959"/>
                 </a:solidFill>
               </a:rPr>
-              <a:t>,</a:t>
-            </a:r>
-          </a:p>
-          <a:p>
-            <a:r>
-              <a:rPr lang="en-US" sz="1400" dirty="0">
-                <a:solidFill>
-                  <a:srgbClr val="595959"/>
-                </a:solidFill>
-              </a:rPr>
-              <a:t>	</a:t>
-            </a:r>
-            <a:r>
-              <a:rPr lang="en-US" sz="1400" dirty="0" smtClean="0">
-                <a:solidFill>
-                  <a:srgbClr val="595959"/>
-                </a:solidFill>
-              </a:rPr>
-              <a:t>			</a:t>
-            </a:r>
-            <a:r>
-              <a:rPr lang="en-US" sz="1400" dirty="0" err="1" smtClean="0">
+              <a:t>				</a:t>
+            </a:r>
+            <a:r>
+              <a:rPr lang="en-US" sz="1400" dirty="0" err="1">
                 <a:solidFill>
                   <a:srgbClr val="595959"/>
                 </a:solidFill>
@@ -9463,41 +8615,17 @@
                   <a:srgbClr val="595959"/>
                 </a:solidFill>
               </a:rPr>
-              <a:t>&gt; output</a:t>
-            </a:r>
-            <a:r>
-              <a:rPr lang="en-US" sz="1400" dirty="0" smtClean="0">
+              <a:t>&gt; output,</a:t>
+            </a:r>
+          </a:p>
+          <a:p>
+            <a:r>
+              <a:rPr lang="en-US" sz="1400" dirty="0">
                 <a:solidFill>
                   <a:srgbClr val="595959"/>
                 </a:solidFill>
               </a:rPr>
-              <a:t>,</a:t>
-            </a:r>
-          </a:p>
-          <a:p>
-            <a:r>
-              <a:rPr lang="en-US" sz="1400" dirty="0">
-                <a:solidFill>
-                  <a:srgbClr val="595959"/>
-                </a:solidFill>
-              </a:rPr>
-              <a:t>	</a:t>
-            </a:r>
-            <a:r>
-              <a:rPr lang="en-US" sz="1400" dirty="0" smtClean="0">
-                <a:solidFill>
-                  <a:srgbClr val="595959"/>
-                </a:solidFill>
-              </a:rPr>
-              <a:t>			Reporter </a:t>
-            </a:r>
-            <a:r>
-              <a:rPr lang="en-US" sz="1400" dirty="0">
-                <a:solidFill>
-                  <a:srgbClr val="595959"/>
-                </a:solidFill>
-              </a:rPr>
-              <a:t>reporter) throws </a:t>
+              <a:t>				Reporter reporter) throws </a:t>
             </a:r>
             <a:r>
               <a:rPr lang="en-US" sz="1400" dirty="0" err="1">
@@ -9690,10 +8818,9 @@
           <a:lstStyle/>
           <a:p>
             <a:r>
-              <a:rPr lang="en-US" smtClean="0"/>
+              <a:rPr lang="en-US"/>
               <a:t>Feb 21, 2014</a:t>
             </a:r>
-            <a:endParaRPr lang="en-US"/>
           </a:p>
         </p:txBody>
       </p:sp>
@@ -9713,7 +8840,7 @@
           <a:lstStyle/>
           <a:p>
             <a:r>
-              <a:rPr lang="de-DE" smtClean="0"/>
+              <a:rPr lang="de-DE"/>
               <a:t>CS512 | Spring 2014</a:t>
             </a:r>
             <a:endParaRPr lang="en-US"/>
@@ -9737,7 +8864,7 @@
           </a:bodyPr>
           <a:lstStyle/>
           <a:p>
-            <a:endParaRPr lang="en-US" dirty="0" smtClean="0"/>
+            <a:endParaRPr lang="en-US" dirty="0"/>
           </a:p>
           <a:p>
             <a:endParaRPr lang="en-US" dirty="0"/>
@@ -9776,13 +8903,6 @@
   <p:clrMapOvr>
     <a:masterClrMapping/>
   </p:clrMapOvr>
-  <p:timing>
-    <p:tnLst>
-      <p:par>
-        <p:cTn xmlns:p14="http://schemas.microsoft.com/office/powerpoint/2010/main" id="1" dur="indefinite" restart="never" nodeType="tmRoot"/>
-      </p:par>
-    </p:tnLst>
-  </p:timing>
 </p:sld>
 </file>
 
@@ -9819,10 +8939,9 @@
           <a:lstStyle/>
           <a:p>
             <a:r>
-              <a:rPr lang="en-US" dirty="0" smtClean="0"/>
+              <a:rPr lang="en-US" dirty="0"/>
               <a:t>Easy…</a:t>
             </a:r>
-            <a:endParaRPr lang="en-US" dirty="0"/>
           </a:p>
         </p:txBody>
       </p:sp>
@@ -9842,13 +8961,13 @@
           <a:lstStyle/>
           <a:p>
             <a:r>
-              <a:rPr lang="en-US" dirty="0" smtClean="0"/>
+              <a:rPr lang="en-US" dirty="0"/>
               <a:t>Computational resources are cheap.</a:t>
             </a:r>
           </a:p>
           <a:p>
             <a:r>
-              <a:rPr lang="en-US" sz="2200" i="1" dirty="0" smtClean="0">
+              <a:rPr lang="en-US" sz="2200" i="1" dirty="0">
                 <a:solidFill>
                   <a:schemeClr val="tx1">
                     <a:lumMod val="65000"/>
@@ -9858,17 +8977,9 @@
               </a:rPr>
               <a:t>Amazon EC2, Microsoft Azure, …</a:t>
             </a:r>
-            <a:endParaRPr lang="en-US" sz="2200" i="1" dirty="0">
-              <a:solidFill>
-                <a:schemeClr val="tx1">
-                  <a:lumMod val="65000"/>
-                  <a:lumOff val="35000"/>
-                </a:schemeClr>
-              </a:solidFill>
-            </a:endParaRPr>
-          </a:p>
-          <a:p>
-            <a:endParaRPr lang="en-US" dirty="0" smtClean="0"/>
+          </a:p>
+          <a:p>
+            <a:endParaRPr lang="en-US" dirty="0"/>
           </a:p>
         </p:txBody>
       </p:sp>
@@ -9888,10 +8999,9 @@
           <a:lstStyle/>
           <a:p>
             <a:r>
-              <a:rPr lang="en-US" smtClean="0"/>
+              <a:rPr lang="en-US"/>
               <a:t>Feb 21, 2014</a:t>
             </a:r>
-            <a:endParaRPr lang="en-US"/>
           </a:p>
         </p:txBody>
       </p:sp>
@@ -9911,28 +9021,9 @@
           <a:lstStyle/>
           <a:p>
             <a:r>
-              <a:rPr lang="de-DE" smtClean="0"/>
+              <a:rPr lang="de-DE"/>
               <a:t>CS512 | Spring 2014</a:t>
             </a:r>
-            <a:endParaRPr lang="en-US"/>
-          </a:p>
-        </p:txBody>
-      </p:sp>
-      <p:sp>
-        <p:nvSpPr>
-          <p:cNvPr id="6" name="Content Placeholder 5"/>
-          <p:cNvSpPr>
-            <a:spLocks noGrp="1"/>
-          </p:cNvSpPr>
-          <p:nvPr>
-            <p:ph idx="13"/>
-          </p:nvPr>
-        </p:nvSpPr>
-        <p:spPr/>
-        <p:txBody>
-          <a:bodyPr/>
-          <a:lstStyle/>
-          <a:p>
             <a:endParaRPr lang="en-US"/>
           </a:p>
         </p:txBody>
@@ -9947,13 +9038,6 @@
   <p:clrMapOvr>
     <a:masterClrMapping/>
   </p:clrMapOvr>
-  <p:timing>
-    <p:tnLst>
-      <p:par>
-        <p:cTn xmlns:p14="http://schemas.microsoft.com/office/powerpoint/2010/main" id="1" dur="indefinite" restart="never" nodeType="tmRoot"/>
-      </p:par>
-    </p:tnLst>
-  </p:timing>
 </p:sld>
 </file>
 
@@ -9990,10 +9074,9 @@
           <a:lstStyle/>
           <a:p>
             <a:r>
-              <a:rPr lang="en-US" dirty="0" smtClean="0"/>
+              <a:rPr lang="en-US" dirty="0"/>
               <a:t>Not really!</a:t>
             </a:r>
-            <a:endParaRPr lang="en-US" dirty="0"/>
           </a:p>
         </p:txBody>
       </p:sp>
@@ -10013,13 +9096,13 @@
           <a:lstStyle/>
           <a:p>
             <a:r>
-              <a:rPr lang="en-US" dirty="0" smtClean="0"/>
+              <a:rPr lang="en-US" dirty="0"/>
               <a:t>Code running on one CPU is simple, two is a headache, four is a nightmare, …</a:t>
             </a:r>
           </a:p>
           <a:p>
             <a:r>
-              <a:rPr lang="en-US" sz="2200" i="1" dirty="0" smtClean="0">
+              <a:rPr lang="en-US" sz="2200" i="1" dirty="0">
                 <a:solidFill>
                   <a:schemeClr val="tx1">
                     <a:lumMod val="65000"/>
@@ -10029,17 +9112,9 @@
               </a:rPr>
               <a:t>You get the picture.</a:t>
             </a:r>
-            <a:endParaRPr lang="en-US" sz="2200" i="1" dirty="0">
-              <a:solidFill>
-                <a:schemeClr val="tx1">
-                  <a:lumMod val="65000"/>
-                  <a:lumOff val="35000"/>
-                </a:schemeClr>
-              </a:solidFill>
-            </a:endParaRPr>
-          </a:p>
-          <a:p>
-            <a:endParaRPr lang="en-US" dirty="0" smtClean="0"/>
+          </a:p>
+          <a:p>
+            <a:endParaRPr lang="en-US" dirty="0"/>
           </a:p>
         </p:txBody>
       </p:sp>
@@ -10059,10 +9134,9 @@
           <a:lstStyle/>
           <a:p>
             <a:r>
-              <a:rPr lang="en-US" smtClean="0"/>
+              <a:rPr lang="en-US"/>
               <a:t>Feb 21, 2014</a:t>
             </a:r>
-            <a:endParaRPr lang="en-US"/>
           </a:p>
         </p:txBody>
       </p:sp>
@@ -10082,28 +9156,9 @@
           <a:lstStyle/>
           <a:p>
             <a:r>
-              <a:rPr lang="de-DE" smtClean="0"/>
+              <a:rPr lang="de-DE"/>
               <a:t>CS512 | Spring 2014</a:t>
             </a:r>
-            <a:endParaRPr lang="en-US"/>
-          </a:p>
-        </p:txBody>
-      </p:sp>
-      <p:sp>
-        <p:nvSpPr>
-          <p:cNvPr id="6" name="Content Placeholder 5"/>
-          <p:cNvSpPr>
-            <a:spLocks noGrp="1"/>
-          </p:cNvSpPr>
-          <p:nvPr>
-            <p:ph idx="13"/>
-          </p:nvPr>
-        </p:nvSpPr>
-        <p:spPr/>
-        <p:txBody>
-          <a:bodyPr/>
-          <a:lstStyle/>
-          <a:p>
             <a:endParaRPr lang="en-US"/>
           </a:p>
         </p:txBody>
@@ -10118,13 +9173,6 @@
   <p:clrMapOvr>
     <a:masterClrMapping/>
   </p:clrMapOvr>
-  <p:timing>
-    <p:tnLst>
-      <p:par>
-        <p:cTn xmlns:p14="http://schemas.microsoft.com/office/powerpoint/2010/main" id="1" dur="indefinite" restart="never" nodeType="tmRoot"/>
-      </p:par>
-    </p:tnLst>
-  </p:timing>
 </p:sld>
 </file>
 
@@ -10161,10 +9209,9 @@
           <a:lstStyle/>
           <a:p>
             <a:r>
-              <a:rPr lang="en-US" dirty="0" smtClean="0"/>
+              <a:rPr lang="en-US" dirty="0"/>
               <a:t>Pipe Dream</a:t>
             </a:r>
-            <a:endParaRPr lang="en-US" dirty="0"/>
           </a:p>
         </p:txBody>
       </p:sp>
@@ -10184,25 +9231,25 @@
           <a:lstStyle/>
           <a:p>
             <a:r>
-              <a:rPr lang="en-US" dirty="0" smtClean="0"/>
+              <a:rPr lang="en-US" dirty="0"/>
               <a:t>Forget multiple machines.</a:t>
             </a:r>
           </a:p>
           <a:p>
             <a:r>
-              <a:rPr lang="en-US" dirty="0" smtClean="0"/>
+              <a:rPr lang="en-US" dirty="0"/>
               <a:t>Just write code imagining one CPU.</a:t>
             </a:r>
           </a:p>
           <a:p>
             <a:r>
-              <a:rPr lang="en-US" dirty="0" smtClean="0"/>
-              <a:t>Someone else takes care of running the code on thousands of machine.</a:t>
-            </a:r>
-          </a:p>
-          <a:p>
-            <a:r>
-              <a:rPr lang="en-US" sz="2200" i="1" dirty="0" smtClean="0">
+              <a:rPr lang="en-US" dirty="0"/>
+              <a:t>Someone else takes care of running the code on thousands of machines.</a:t>
+            </a:r>
+          </a:p>
+          <a:p>
+            <a:r>
+              <a:rPr lang="en-US" sz="2200" i="1" dirty="0">
                 <a:solidFill>
                   <a:schemeClr val="tx1">
                     <a:lumMod val="65000"/>
@@ -10212,17 +9259,9 @@
               </a:rPr>
               <a:t>Free the programmer from the unnecessary details.</a:t>
             </a:r>
-            <a:endParaRPr lang="en-US" sz="2200" i="1" dirty="0">
-              <a:solidFill>
-                <a:schemeClr val="tx1">
-                  <a:lumMod val="65000"/>
-                  <a:lumOff val="35000"/>
-                </a:schemeClr>
-              </a:solidFill>
-            </a:endParaRPr>
-          </a:p>
-          <a:p>
-            <a:endParaRPr lang="en-US" dirty="0" smtClean="0"/>
+          </a:p>
+          <a:p>
+            <a:endParaRPr lang="en-US" dirty="0"/>
           </a:p>
         </p:txBody>
       </p:sp>
@@ -10242,10 +9281,9 @@
           <a:lstStyle/>
           <a:p>
             <a:r>
-              <a:rPr lang="en-US" smtClean="0"/>
+              <a:rPr lang="en-US"/>
               <a:t>Feb 21, 2014</a:t>
             </a:r>
-            <a:endParaRPr lang="en-US"/>
           </a:p>
         </p:txBody>
       </p:sp>
@@ -10265,28 +9303,9 @@
           <a:lstStyle/>
           <a:p>
             <a:r>
-              <a:rPr lang="de-DE" smtClean="0"/>
+              <a:rPr lang="de-DE"/>
               <a:t>CS512 | Spring 2014</a:t>
             </a:r>
-            <a:endParaRPr lang="en-US"/>
-          </a:p>
-        </p:txBody>
-      </p:sp>
-      <p:sp>
-        <p:nvSpPr>
-          <p:cNvPr id="6" name="Content Placeholder 5"/>
-          <p:cNvSpPr>
-            <a:spLocks noGrp="1"/>
-          </p:cNvSpPr>
-          <p:nvPr>
-            <p:ph idx="13"/>
-          </p:nvPr>
-        </p:nvSpPr>
-        <p:spPr/>
-        <p:txBody>
-          <a:bodyPr/>
-          <a:lstStyle/>
-          <a:p>
             <a:endParaRPr lang="en-US"/>
           </a:p>
         </p:txBody>
@@ -10301,13 +9320,6 @@
   <p:clrMapOvr>
     <a:masterClrMapping/>
   </p:clrMapOvr>
-  <p:timing>
-    <p:tnLst>
-      <p:par>
-        <p:cTn xmlns:p14="http://schemas.microsoft.com/office/powerpoint/2010/main" id="1" dur="indefinite" restart="never" nodeType="tmRoot"/>
-      </p:par>
-    </p:tnLst>
-  </p:timing>
 </p:sld>
 </file>
 
@@ -10344,10 +9356,9 @@
           <a:lstStyle/>
           <a:p>
             <a:r>
-              <a:rPr lang="en-US" dirty="0" smtClean="0"/>
-              <a:t>Map-Reduce</a:t>
-            </a:r>
-            <a:endParaRPr lang="en-US" dirty="0"/>
+              <a:rPr lang="en-US" dirty="0"/>
+              <a:t>MapReduce</a:t>
+            </a:r>
           </a:p>
         </p:txBody>
       </p:sp>
@@ -10367,8 +9378,8 @@
           <a:lstStyle/>
           <a:p>
             <a:r>
-              <a:rPr lang="en-US" dirty="0" smtClean="0"/>
-              <a:t>map-reduce programming model to the rescue</a:t>
+              <a:rPr lang="en-US" dirty="0"/>
+              <a:t>MapReduce programming model to the rescue</a:t>
             </a:r>
           </a:p>
         </p:txBody>
@@ -10389,10 +9400,9 @@
           <a:lstStyle/>
           <a:p>
             <a:r>
-              <a:rPr lang="en-US" smtClean="0"/>
+              <a:rPr lang="en-US"/>
               <a:t>Feb 21, 2014</a:t>
             </a:r>
-            <a:endParaRPr lang="en-US"/>
           </a:p>
         </p:txBody>
       </p:sp>
@@ -10412,28 +9422,9 @@
           <a:lstStyle/>
           <a:p>
             <a:r>
-              <a:rPr lang="de-DE" smtClean="0"/>
+              <a:rPr lang="de-DE"/>
               <a:t>CS512 | Spring 2014</a:t>
             </a:r>
-            <a:endParaRPr lang="en-US"/>
-          </a:p>
-        </p:txBody>
-      </p:sp>
-      <p:sp>
-        <p:nvSpPr>
-          <p:cNvPr id="6" name="Content Placeholder 5"/>
-          <p:cNvSpPr>
-            <a:spLocks noGrp="1"/>
-          </p:cNvSpPr>
-          <p:nvPr>
-            <p:ph idx="13"/>
-          </p:nvPr>
-        </p:nvSpPr>
-        <p:spPr/>
-        <p:txBody>
-          <a:bodyPr/>
-          <a:lstStyle/>
-          <a:p>
             <a:endParaRPr lang="en-US"/>
           </a:p>
         </p:txBody>
@@ -10448,13 +9439,6 @@
   <p:clrMapOvr>
     <a:masterClrMapping/>
   </p:clrMapOvr>
-  <p:timing>
-    <p:tnLst>
-      <p:par>
-        <p:cTn xmlns:p14="http://schemas.microsoft.com/office/powerpoint/2010/main" id="1" dur="indefinite" restart="never" nodeType="tmRoot"/>
-      </p:par>
-    </p:tnLst>
-  </p:timing>
 </p:sld>
 </file>
 
@@ -10491,39 +9475,38 @@
           <a:lstStyle/>
           <a:p>
             <a:r>
-              <a:rPr lang="en-US" dirty="0" smtClean="0"/>
+              <a:rPr lang="en-US" dirty="0"/>
               <a:t>Long long ago…</a:t>
             </a:r>
+          </a:p>
+        </p:txBody>
+      </p:sp>
+      <p:sp>
+        <p:nvSpPr>
+          <p:cNvPr id="3" name="Content Placeholder 2"/>
+          <p:cNvSpPr>
+            <a:spLocks noGrp="1"/>
+          </p:cNvSpPr>
+          <p:nvPr>
+            <p:ph idx="1"/>
+          </p:nvPr>
+        </p:nvSpPr>
+        <p:spPr/>
+        <p:txBody>
+          <a:bodyPr/>
+          <a:lstStyle/>
+          <a:p>
+            <a:r>
+              <a:rPr lang="en-US" dirty="0"/>
+              <a:t>LISP, 1958</a:t>
+            </a:r>
+          </a:p>
+          <a:p>
             <a:endParaRPr lang="en-US" dirty="0"/>
           </a:p>
-        </p:txBody>
-      </p:sp>
-      <p:sp>
-        <p:nvSpPr>
-          <p:cNvPr id="3" name="Content Placeholder 2"/>
-          <p:cNvSpPr>
-            <a:spLocks noGrp="1"/>
-          </p:cNvSpPr>
-          <p:nvPr>
-            <p:ph idx="1"/>
-          </p:nvPr>
-        </p:nvSpPr>
-        <p:spPr/>
-        <p:txBody>
-          <a:bodyPr/>
-          <a:lstStyle/>
-          <a:p>
-            <a:r>
-              <a:rPr lang="en-US" dirty="0" smtClean="0"/>
-              <a:t>LISP, 1958</a:t>
-            </a:r>
-          </a:p>
-          <a:p>
-            <a:endParaRPr lang="en-US" dirty="0" smtClean="0"/>
-          </a:p>
-          <a:p>
-            <a:r>
-              <a:rPr lang="en-US" dirty="0" smtClean="0"/>
+          <a:p>
+            <a:r>
+              <a:rPr lang="en-US" dirty="0"/>
               <a:t>A programming language that introduced several innovative ideas</a:t>
             </a:r>
           </a:p>
@@ -10545,38 +9528,37 @@
           <a:lstStyle/>
           <a:p>
             <a:r>
-              <a:rPr lang="en-US" smtClean="0"/>
+              <a:rPr lang="en-US"/>
               <a:t>Feb 21, 2014</a:t>
             </a:r>
+          </a:p>
+        </p:txBody>
+      </p:sp>
+      <p:sp>
+        <p:nvSpPr>
+          <p:cNvPr id="5" name="Footer Placeholder 4"/>
+          <p:cNvSpPr>
+            <a:spLocks noGrp="1"/>
+          </p:cNvSpPr>
+          <p:nvPr>
+            <p:ph type="ftr" sz="quarter" idx="11"/>
+          </p:nvPr>
+        </p:nvSpPr>
+        <p:spPr/>
+        <p:txBody>
+          <a:bodyPr/>
+          <a:lstStyle/>
+          <a:p>
+            <a:r>
+              <a:rPr lang="de-DE"/>
+              <a:t>CS512 | Spring 2014</a:t>
+            </a:r>
             <a:endParaRPr lang="en-US"/>
           </a:p>
         </p:txBody>
       </p:sp>
       <p:sp>
         <p:nvSpPr>
-          <p:cNvPr id="5" name="Footer Placeholder 4"/>
-          <p:cNvSpPr>
-            <a:spLocks noGrp="1"/>
-          </p:cNvSpPr>
-          <p:nvPr>
-            <p:ph type="ftr" sz="quarter" idx="11"/>
-          </p:nvPr>
-        </p:nvSpPr>
-        <p:spPr/>
-        <p:txBody>
-          <a:bodyPr/>
-          <a:lstStyle/>
-          <a:p>
-            <a:r>
-              <a:rPr lang="de-DE" smtClean="0"/>
-              <a:t>CS512 | Spring 2014</a:t>
-            </a:r>
-            <a:endParaRPr lang="en-US"/>
-          </a:p>
-        </p:txBody>
-      </p:sp>
-      <p:sp>
-        <p:nvSpPr>
           <p:cNvPr id="6" name="Content Placeholder 5"/>
           <p:cNvSpPr>
             <a:spLocks noGrp="1"/>
@@ -10591,13 +9573,13 @@
           <a:lstStyle/>
           <a:p>
             <a:r>
-              <a:rPr lang="en-US" i="1" dirty="0" smtClean="0"/>
+              <a:rPr lang="en-US" i="1" dirty="0"/>
               <a:t>Recursive Functions of Symbolic Expression and Their Computation by Machine, Part I</a:t>
             </a:r>
           </a:p>
           <a:p>
             <a:r>
-              <a:rPr lang="en-US" i="1" dirty="0" smtClean="0"/>
+              <a:rPr lang="en-US" i="1" dirty="0"/>
               <a:t>John McCarthy, MIT, April 1960</a:t>
             </a:r>
           </a:p>
@@ -10613,13 +9595,6 @@
   <p:clrMapOvr>
     <a:masterClrMapping/>
   </p:clrMapOvr>
-  <p:timing>
-    <p:tnLst>
-      <p:par>
-        <p:cTn xmlns:p14="http://schemas.microsoft.com/office/powerpoint/2010/main" id="1" dur="indefinite" restart="never" nodeType="tmRoot"/>
-      </p:par>
-    </p:tnLst>
-  </p:timing>
 </p:sld>
 </file>
 
@@ -10656,53 +9631,48 @@
           <a:lstStyle/>
           <a:p>
             <a:r>
-              <a:rPr lang="en-US" dirty="0" smtClean="0"/>
+              <a:rPr lang="en-US" dirty="0"/>
               <a:t>LISP</a:t>
             </a:r>
+          </a:p>
+        </p:txBody>
+      </p:sp>
+      <p:sp>
+        <p:nvSpPr>
+          <p:cNvPr id="3" name="Content Placeholder 2"/>
+          <p:cNvSpPr>
+            <a:spLocks noGrp="1"/>
+          </p:cNvSpPr>
+          <p:nvPr>
+            <p:ph idx="1"/>
+          </p:nvPr>
+        </p:nvSpPr>
+        <p:spPr/>
+        <p:txBody>
+          <a:bodyPr/>
+          <a:lstStyle/>
+          <a:p>
+            <a:r>
+              <a:rPr lang="en-US" dirty="0"/>
+              <a:t>Introduced </a:t>
+            </a:r>
+            <a:r>
+              <a:rPr lang="en-US" i="1" dirty="0"/>
+              <a:t>map()</a:t>
+            </a:r>
+            <a:r>
+              <a:rPr lang="en-US" dirty="0"/>
+              <a:t> and </a:t>
+            </a:r>
+            <a:r>
+              <a:rPr lang="en-US" i="1" dirty="0"/>
+              <a:t>reduce() functions.</a:t>
+            </a:r>
             <a:endParaRPr lang="en-US" dirty="0"/>
           </a:p>
-        </p:txBody>
-      </p:sp>
-      <p:sp>
-        <p:nvSpPr>
-          <p:cNvPr id="3" name="Content Placeholder 2"/>
-          <p:cNvSpPr>
-            <a:spLocks noGrp="1"/>
-          </p:cNvSpPr>
-          <p:nvPr>
-            <p:ph idx="1"/>
-          </p:nvPr>
-        </p:nvSpPr>
-        <p:spPr/>
-        <p:txBody>
-          <a:bodyPr/>
-          <a:lstStyle/>
-          <a:p>
-            <a:r>
-              <a:rPr lang="en-US" dirty="0" smtClean="0"/>
-              <a:t>Introduced </a:t>
-            </a:r>
-            <a:r>
-              <a:rPr lang="en-US" i="1" dirty="0" smtClean="0"/>
-              <a:t>map</a:t>
-            </a:r>
-            <a:r>
-              <a:rPr lang="en-US" dirty="0" smtClean="0"/>
-              <a:t> and </a:t>
-            </a:r>
-            <a:r>
-              <a:rPr lang="en-US" i="1" dirty="0" smtClean="0"/>
-              <a:t>reduce</a:t>
-            </a:r>
-            <a:r>
-              <a:rPr lang="en-US" dirty="0" smtClean="0"/>
-              <a:t>.</a:t>
-            </a:r>
+          <a:p>
             <a:endParaRPr lang="en-US" dirty="0"/>
           </a:p>
-          <a:p>
-            <a:endParaRPr lang="en-US" dirty="0" smtClean="0"/>
-          </a:p>
         </p:txBody>
       </p:sp>
       <p:sp>
@@ -10721,52 +9691,32 @@
           <a:lstStyle/>
           <a:p>
             <a:r>
-              <a:rPr lang="en-US" smtClean="0"/>
+              <a:rPr lang="en-US"/>
               <a:t>Feb 21, 2014</a:t>
             </a:r>
+          </a:p>
+        </p:txBody>
+      </p:sp>
+      <p:sp>
+        <p:nvSpPr>
+          <p:cNvPr id="5" name="Footer Placeholder 4"/>
+          <p:cNvSpPr>
+            <a:spLocks noGrp="1"/>
+          </p:cNvSpPr>
+          <p:nvPr>
+            <p:ph type="ftr" sz="quarter" idx="11"/>
+          </p:nvPr>
+        </p:nvSpPr>
+        <p:spPr/>
+        <p:txBody>
+          <a:bodyPr/>
+          <a:lstStyle/>
+          <a:p>
+            <a:r>
+              <a:rPr lang="de-DE"/>
+              <a:t>CS512 | Spring 2014</a:t>
+            </a:r>
             <a:endParaRPr lang="en-US"/>
-          </a:p>
-        </p:txBody>
-      </p:sp>
-      <p:sp>
-        <p:nvSpPr>
-          <p:cNvPr id="5" name="Footer Placeholder 4"/>
-          <p:cNvSpPr>
-            <a:spLocks noGrp="1"/>
-          </p:cNvSpPr>
-          <p:nvPr>
-            <p:ph type="ftr" sz="quarter" idx="11"/>
-          </p:nvPr>
-        </p:nvSpPr>
-        <p:spPr/>
-        <p:txBody>
-          <a:bodyPr/>
-          <a:lstStyle/>
-          <a:p>
-            <a:r>
-              <a:rPr lang="de-DE" smtClean="0"/>
-              <a:t>CS512 | Spring 2014</a:t>
-            </a:r>
-            <a:endParaRPr lang="en-US"/>
-          </a:p>
-        </p:txBody>
-      </p:sp>
-      <p:sp>
-        <p:nvSpPr>
-          <p:cNvPr id="6" name="Content Placeholder 5"/>
-          <p:cNvSpPr>
-            <a:spLocks noGrp="1"/>
-          </p:cNvSpPr>
-          <p:nvPr>
-            <p:ph idx="13"/>
-          </p:nvPr>
-        </p:nvSpPr>
-        <p:spPr/>
-        <p:txBody>
-          <a:bodyPr/>
-          <a:lstStyle/>
-          <a:p>
-            <a:endParaRPr lang="en-US" i="1" dirty="0" smtClean="0"/>
           </a:p>
         </p:txBody>
       </p:sp>
@@ -10780,13 +9730,6 @@
   <p:clrMapOvr>
     <a:masterClrMapping/>
   </p:clrMapOvr>
-  <p:timing>
-    <p:tnLst>
-      <p:par>
-        <p:cTn xmlns:p14="http://schemas.microsoft.com/office/powerpoint/2010/main" id="1" dur="indefinite" restart="never" nodeType="tmRoot"/>
-      </p:par>
-    </p:tnLst>
-  </p:timing>
 </p:sld>
 </file>
 
